--- a/documents/Figures.pptx
+++ b/documents/Figures.pptx
@@ -7,6 +7,7 @@
   <p:sldIdLst>
     <p:sldId id="258" r:id="rId2"/>
     <p:sldId id="257" r:id="rId3"/>
+    <p:sldId id="259" r:id="rId4"/>
   </p:sldIdLst>
   <p:sldSz cx="12192000" cy="6858000"/>
   <p:notesSz cx="6858000" cy="9144000"/>
@@ -262,7 +263,7 @@
           <a:p>
             <a:fld id="{0E49C18B-B15C-40CF-A333-34862625C136}" type="datetimeFigureOut">
               <a:rPr lang="en-PH" smtClean="0"/>
-              <a:t>7/9/2025</a:t>
+              <a:t>7/23/2025</a:t>
             </a:fld>
             <a:endParaRPr lang="en-PH"/>
           </a:p>
@@ -462,7 +463,7 @@
           <a:p>
             <a:fld id="{0E49C18B-B15C-40CF-A333-34862625C136}" type="datetimeFigureOut">
               <a:rPr lang="en-PH" smtClean="0"/>
-              <a:t>7/9/2025</a:t>
+              <a:t>7/23/2025</a:t>
             </a:fld>
             <a:endParaRPr lang="en-PH"/>
           </a:p>
@@ -672,7 +673,7 @@
           <a:p>
             <a:fld id="{0E49C18B-B15C-40CF-A333-34862625C136}" type="datetimeFigureOut">
               <a:rPr lang="en-PH" smtClean="0"/>
-              <a:t>7/9/2025</a:t>
+              <a:t>7/23/2025</a:t>
             </a:fld>
             <a:endParaRPr lang="en-PH"/>
           </a:p>
@@ -872,7 +873,7 @@
           <a:p>
             <a:fld id="{0E49C18B-B15C-40CF-A333-34862625C136}" type="datetimeFigureOut">
               <a:rPr lang="en-PH" smtClean="0"/>
-              <a:t>7/9/2025</a:t>
+              <a:t>7/23/2025</a:t>
             </a:fld>
             <a:endParaRPr lang="en-PH"/>
           </a:p>
@@ -1148,7 +1149,7 @@
           <a:p>
             <a:fld id="{0E49C18B-B15C-40CF-A333-34862625C136}" type="datetimeFigureOut">
               <a:rPr lang="en-PH" smtClean="0"/>
-              <a:t>7/9/2025</a:t>
+              <a:t>7/23/2025</a:t>
             </a:fld>
             <a:endParaRPr lang="en-PH"/>
           </a:p>
@@ -1416,7 +1417,7 @@
           <a:p>
             <a:fld id="{0E49C18B-B15C-40CF-A333-34862625C136}" type="datetimeFigureOut">
               <a:rPr lang="en-PH" smtClean="0"/>
-              <a:t>7/9/2025</a:t>
+              <a:t>7/23/2025</a:t>
             </a:fld>
             <a:endParaRPr lang="en-PH"/>
           </a:p>
@@ -1831,7 +1832,7 @@
           <a:p>
             <a:fld id="{0E49C18B-B15C-40CF-A333-34862625C136}" type="datetimeFigureOut">
               <a:rPr lang="en-PH" smtClean="0"/>
-              <a:t>7/9/2025</a:t>
+              <a:t>7/23/2025</a:t>
             </a:fld>
             <a:endParaRPr lang="en-PH"/>
           </a:p>
@@ -1973,7 +1974,7 @@
           <a:p>
             <a:fld id="{0E49C18B-B15C-40CF-A333-34862625C136}" type="datetimeFigureOut">
               <a:rPr lang="en-PH" smtClean="0"/>
-              <a:t>7/9/2025</a:t>
+              <a:t>7/23/2025</a:t>
             </a:fld>
             <a:endParaRPr lang="en-PH"/>
           </a:p>
@@ -2086,7 +2087,7 @@
           <a:p>
             <a:fld id="{0E49C18B-B15C-40CF-A333-34862625C136}" type="datetimeFigureOut">
               <a:rPr lang="en-PH" smtClean="0"/>
-              <a:t>7/9/2025</a:t>
+              <a:t>7/23/2025</a:t>
             </a:fld>
             <a:endParaRPr lang="en-PH"/>
           </a:p>
@@ -2399,7 +2400,7 @@
           <a:p>
             <a:fld id="{0E49C18B-B15C-40CF-A333-34862625C136}" type="datetimeFigureOut">
               <a:rPr lang="en-PH" smtClean="0"/>
-              <a:t>7/9/2025</a:t>
+              <a:t>7/23/2025</a:t>
             </a:fld>
             <a:endParaRPr lang="en-PH"/>
           </a:p>
@@ -2688,7 +2689,7 @@
           <a:p>
             <a:fld id="{0E49C18B-B15C-40CF-A333-34862625C136}" type="datetimeFigureOut">
               <a:rPr lang="en-PH" smtClean="0"/>
-              <a:t>7/9/2025</a:t>
+              <a:t>7/23/2025</a:t>
             </a:fld>
             <a:endParaRPr lang="en-PH"/>
           </a:p>
@@ -2931,7 +2932,7 @@
           <a:p>
             <a:fld id="{0E49C18B-B15C-40CF-A333-34862625C136}" type="datetimeFigureOut">
               <a:rPr lang="en-PH" smtClean="0"/>
-              <a:t>7/9/2025</a:t>
+              <a:t>7/23/2025</a:t>
             </a:fld>
             <a:endParaRPr lang="en-PH"/>
           </a:p>
@@ -10929,6 +10930,3507 @@
 </p:sld>
 </file>
 
+<file path=ppt/slides/slide3.xml><?xml version="1.0" encoding="utf-8"?>
+<p:sld xmlns:a="http://schemas.openxmlformats.org/drawingml/2006/main" xmlns:r="http://schemas.openxmlformats.org/officeDocument/2006/relationships" xmlns:p="http://schemas.openxmlformats.org/presentationml/2006/main">
+  <p:cSld>
+    <p:spTree>
+      <p:nvGrpSpPr>
+        <p:cNvPr id="1" name=""/>
+        <p:cNvGrpSpPr/>
+        <p:nvPr/>
+      </p:nvGrpSpPr>
+      <p:grpSpPr>
+        <a:xfrm>
+          <a:off x="0" y="0"/>
+          <a:ext cx="0" cy="0"/>
+          <a:chOff x="0" y="0"/>
+          <a:chExt cx="0" cy="0"/>
+        </a:xfrm>
+      </p:grpSpPr>
+      <p:grpSp>
+        <p:nvGrpSpPr>
+          <p:cNvPr id="44" name="Group 43">
+            <a:extLst>
+              <a:ext uri="{FF2B5EF4-FFF2-40B4-BE49-F238E27FC236}">
+                <a16:creationId xmlns:a16="http://schemas.microsoft.com/office/drawing/2014/main" id="{CE6FC9C4-D50B-5603-B560-4D96E6D772C3}"/>
+              </a:ext>
+            </a:extLst>
+          </p:cNvPr>
+          <p:cNvGrpSpPr/>
+          <p:nvPr/>
+        </p:nvGrpSpPr>
+        <p:grpSpPr>
+          <a:xfrm>
+            <a:off x="1407584" y="1525774"/>
+            <a:ext cx="2460674" cy="1253109"/>
+            <a:chOff x="668113" y="1525774"/>
+            <a:chExt cx="2460674" cy="1253109"/>
+          </a:xfrm>
+        </p:grpSpPr>
+        <p:grpSp>
+          <p:nvGrpSpPr>
+            <p:cNvPr id="16" name="Group 15">
+              <a:extLst>
+                <a:ext uri="{FF2B5EF4-FFF2-40B4-BE49-F238E27FC236}">
+                  <a16:creationId xmlns:a16="http://schemas.microsoft.com/office/drawing/2014/main" id="{2D693278-CE81-76A2-EDC0-D198772B5760}"/>
+                </a:ext>
+              </a:extLst>
+            </p:cNvPr>
+            <p:cNvGrpSpPr/>
+            <p:nvPr/>
+          </p:nvGrpSpPr>
+          <p:grpSpPr>
+            <a:xfrm>
+              <a:off x="1481007" y="1525774"/>
+              <a:ext cx="834888" cy="883777"/>
+              <a:chOff x="3657599" y="1525774"/>
+              <a:chExt cx="834888" cy="883777"/>
+            </a:xfrm>
+          </p:grpSpPr>
+          <p:grpSp>
+            <p:nvGrpSpPr>
+              <p:cNvPr id="14" name="Group 13">
+                <a:extLst>
+                  <a:ext uri="{FF2B5EF4-FFF2-40B4-BE49-F238E27FC236}">
+                    <a16:creationId xmlns:a16="http://schemas.microsoft.com/office/drawing/2014/main" id="{1498193F-5854-0400-52BB-FE39107B8E8E}"/>
+                  </a:ext>
+                </a:extLst>
+              </p:cNvPr>
+              <p:cNvGrpSpPr/>
+              <p:nvPr/>
+            </p:nvGrpSpPr>
+            <p:grpSpPr>
+              <a:xfrm>
+                <a:off x="3657600" y="1525774"/>
+                <a:ext cx="834887" cy="576000"/>
+                <a:chOff x="3657600" y="1525774"/>
+                <a:chExt cx="1080000" cy="576000"/>
+              </a:xfrm>
+            </p:grpSpPr>
+            <p:sp>
+              <p:nvSpPr>
+                <p:cNvPr id="2" name="Rectangle 1">
+                  <a:extLst>
+                    <a:ext uri="{FF2B5EF4-FFF2-40B4-BE49-F238E27FC236}">
+                      <a16:creationId xmlns:a16="http://schemas.microsoft.com/office/drawing/2014/main" id="{A6EA4762-9424-890C-0CDD-8A71C8F1275B}"/>
+                    </a:ext>
+                  </a:extLst>
+                </p:cNvPr>
+                <p:cNvSpPr/>
+                <p:nvPr/>
+              </p:nvSpPr>
+              <p:spPr>
+                <a:xfrm>
+                  <a:off x="3657600" y="1669774"/>
+                  <a:ext cx="360000" cy="144000"/>
+                </a:xfrm>
+                <a:prstGeom prst="rect">
+                  <a:avLst/>
+                </a:prstGeom>
+                <a:noFill/>
+              </p:spPr>
+              <p:style>
+                <a:lnRef idx="2">
+                  <a:schemeClr val="accent1">
+                    <a:shade val="15000"/>
+                  </a:schemeClr>
+                </a:lnRef>
+                <a:fillRef idx="1">
+                  <a:schemeClr val="accent1"/>
+                </a:fillRef>
+                <a:effectRef idx="0">
+                  <a:schemeClr val="accent1"/>
+                </a:effectRef>
+                <a:fontRef idx="minor">
+                  <a:schemeClr val="lt1"/>
+                </a:fontRef>
+              </p:style>
+              <p:txBody>
+                <a:bodyPr rtlCol="0" anchor="ctr"/>
+                <a:lstStyle/>
+                <a:p>
+                  <a:pPr algn="ctr"/>
+                  <a:endParaRPr lang="en-PH"/>
+                </a:p>
+              </p:txBody>
+            </p:sp>
+            <p:sp>
+              <p:nvSpPr>
+                <p:cNvPr id="3" name="Rectangle 2">
+                  <a:extLst>
+                    <a:ext uri="{FF2B5EF4-FFF2-40B4-BE49-F238E27FC236}">
+                      <a16:creationId xmlns:a16="http://schemas.microsoft.com/office/drawing/2014/main" id="{14E364DD-061C-464E-4CB4-592D5E9F8743}"/>
+                    </a:ext>
+                  </a:extLst>
+                </p:cNvPr>
+                <p:cNvSpPr/>
+                <p:nvPr/>
+              </p:nvSpPr>
+              <p:spPr>
+                <a:xfrm>
+                  <a:off x="4017600" y="1669774"/>
+                  <a:ext cx="360000" cy="144000"/>
+                </a:xfrm>
+                <a:prstGeom prst="rect">
+                  <a:avLst/>
+                </a:prstGeom>
+                <a:noFill/>
+              </p:spPr>
+              <p:style>
+                <a:lnRef idx="2">
+                  <a:schemeClr val="accent1">
+                    <a:shade val="15000"/>
+                  </a:schemeClr>
+                </a:lnRef>
+                <a:fillRef idx="1">
+                  <a:schemeClr val="accent1"/>
+                </a:fillRef>
+                <a:effectRef idx="0">
+                  <a:schemeClr val="accent1"/>
+                </a:effectRef>
+                <a:fontRef idx="minor">
+                  <a:schemeClr val="lt1"/>
+                </a:fontRef>
+              </p:style>
+              <p:txBody>
+                <a:bodyPr rtlCol="0" anchor="ctr"/>
+                <a:lstStyle/>
+                <a:p>
+                  <a:pPr algn="ctr"/>
+                  <a:endParaRPr lang="en-PH"/>
+                </a:p>
+              </p:txBody>
+            </p:sp>
+            <p:sp>
+              <p:nvSpPr>
+                <p:cNvPr id="4" name="Rectangle 3">
+                  <a:extLst>
+                    <a:ext uri="{FF2B5EF4-FFF2-40B4-BE49-F238E27FC236}">
+                      <a16:creationId xmlns:a16="http://schemas.microsoft.com/office/drawing/2014/main" id="{81AA4C82-A498-E7AC-E775-9BFC0FA17DF1}"/>
+                    </a:ext>
+                  </a:extLst>
+                </p:cNvPr>
+                <p:cNvSpPr/>
+                <p:nvPr/>
+              </p:nvSpPr>
+              <p:spPr>
+                <a:xfrm>
+                  <a:off x="4377600" y="1669774"/>
+                  <a:ext cx="360000" cy="144000"/>
+                </a:xfrm>
+                <a:prstGeom prst="rect">
+                  <a:avLst/>
+                </a:prstGeom>
+                <a:noFill/>
+              </p:spPr>
+              <p:style>
+                <a:lnRef idx="2">
+                  <a:schemeClr val="accent1">
+                    <a:shade val="15000"/>
+                  </a:schemeClr>
+                </a:lnRef>
+                <a:fillRef idx="1">
+                  <a:schemeClr val="accent1"/>
+                </a:fillRef>
+                <a:effectRef idx="0">
+                  <a:schemeClr val="accent1"/>
+                </a:effectRef>
+                <a:fontRef idx="minor">
+                  <a:schemeClr val="lt1"/>
+                </a:fontRef>
+              </p:style>
+              <p:txBody>
+                <a:bodyPr rtlCol="0" anchor="ctr"/>
+                <a:lstStyle/>
+                <a:p>
+                  <a:pPr algn="ctr"/>
+                  <a:endParaRPr lang="en-PH"/>
+                </a:p>
+              </p:txBody>
+            </p:sp>
+            <p:sp>
+              <p:nvSpPr>
+                <p:cNvPr id="5" name="Rectangle 4">
+                  <a:extLst>
+                    <a:ext uri="{FF2B5EF4-FFF2-40B4-BE49-F238E27FC236}">
+                      <a16:creationId xmlns:a16="http://schemas.microsoft.com/office/drawing/2014/main" id="{FBE4FF25-B55B-B41A-1704-B86511F1FD35}"/>
+                    </a:ext>
+                  </a:extLst>
+                </p:cNvPr>
+                <p:cNvSpPr/>
+                <p:nvPr/>
+              </p:nvSpPr>
+              <p:spPr>
+                <a:xfrm>
+                  <a:off x="3657600" y="1813774"/>
+                  <a:ext cx="360000" cy="144000"/>
+                </a:xfrm>
+                <a:prstGeom prst="rect">
+                  <a:avLst/>
+                </a:prstGeom>
+                <a:noFill/>
+              </p:spPr>
+              <p:style>
+                <a:lnRef idx="2">
+                  <a:schemeClr val="accent1">
+                    <a:shade val="15000"/>
+                  </a:schemeClr>
+                </a:lnRef>
+                <a:fillRef idx="1">
+                  <a:schemeClr val="accent1"/>
+                </a:fillRef>
+                <a:effectRef idx="0">
+                  <a:schemeClr val="accent1"/>
+                </a:effectRef>
+                <a:fontRef idx="minor">
+                  <a:schemeClr val="lt1"/>
+                </a:fontRef>
+              </p:style>
+              <p:txBody>
+                <a:bodyPr rtlCol="0" anchor="ctr"/>
+                <a:lstStyle/>
+                <a:p>
+                  <a:pPr algn="ctr"/>
+                  <a:endParaRPr lang="en-PH"/>
+                </a:p>
+              </p:txBody>
+            </p:sp>
+            <p:sp>
+              <p:nvSpPr>
+                <p:cNvPr id="6" name="Rectangle 5">
+                  <a:extLst>
+                    <a:ext uri="{FF2B5EF4-FFF2-40B4-BE49-F238E27FC236}">
+                      <a16:creationId xmlns:a16="http://schemas.microsoft.com/office/drawing/2014/main" id="{748533BD-05D7-B920-DCE4-E97EB1B03263}"/>
+                    </a:ext>
+                  </a:extLst>
+                </p:cNvPr>
+                <p:cNvSpPr/>
+                <p:nvPr/>
+              </p:nvSpPr>
+              <p:spPr>
+                <a:xfrm>
+                  <a:off x="4017600" y="1813774"/>
+                  <a:ext cx="360000" cy="144000"/>
+                </a:xfrm>
+                <a:prstGeom prst="rect">
+                  <a:avLst/>
+                </a:prstGeom>
+                <a:noFill/>
+              </p:spPr>
+              <p:style>
+                <a:lnRef idx="2">
+                  <a:schemeClr val="accent1">
+                    <a:shade val="15000"/>
+                  </a:schemeClr>
+                </a:lnRef>
+                <a:fillRef idx="1">
+                  <a:schemeClr val="accent1"/>
+                </a:fillRef>
+                <a:effectRef idx="0">
+                  <a:schemeClr val="accent1"/>
+                </a:effectRef>
+                <a:fontRef idx="minor">
+                  <a:schemeClr val="lt1"/>
+                </a:fontRef>
+              </p:style>
+              <p:txBody>
+                <a:bodyPr rtlCol="0" anchor="ctr"/>
+                <a:lstStyle/>
+                <a:p>
+                  <a:pPr algn="ctr"/>
+                  <a:endParaRPr lang="en-PH"/>
+                </a:p>
+              </p:txBody>
+            </p:sp>
+            <p:sp>
+              <p:nvSpPr>
+                <p:cNvPr id="7" name="Rectangle 6">
+                  <a:extLst>
+                    <a:ext uri="{FF2B5EF4-FFF2-40B4-BE49-F238E27FC236}">
+                      <a16:creationId xmlns:a16="http://schemas.microsoft.com/office/drawing/2014/main" id="{F9D5C46D-B296-C4CD-F0B4-49EB12380DB0}"/>
+                    </a:ext>
+                  </a:extLst>
+                </p:cNvPr>
+                <p:cNvSpPr/>
+                <p:nvPr/>
+              </p:nvSpPr>
+              <p:spPr>
+                <a:xfrm>
+                  <a:off x="4377600" y="1813774"/>
+                  <a:ext cx="360000" cy="144000"/>
+                </a:xfrm>
+                <a:prstGeom prst="rect">
+                  <a:avLst/>
+                </a:prstGeom>
+                <a:noFill/>
+              </p:spPr>
+              <p:style>
+                <a:lnRef idx="2">
+                  <a:schemeClr val="accent1">
+                    <a:shade val="15000"/>
+                  </a:schemeClr>
+                </a:lnRef>
+                <a:fillRef idx="1">
+                  <a:schemeClr val="accent1"/>
+                </a:fillRef>
+                <a:effectRef idx="0">
+                  <a:schemeClr val="accent1"/>
+                </a:effectRef>
+                <a:fontRef idx="minor">
+                  <a:schemeClr val="lt1"/>
+                </a:fontRef>
+              </p:style>
+              <p:txBody>
+                <a:bodyPr rtlCol="0" anchor="ctr"/>
+                <a:lstStyle/>
+                <a:p>
+                  <a:pPr algn="ctr"/>
+                  <a:endParaRPr lang="en-PH"/>
+                </a:p>
+              </p:txBody>
+            </p:sp>
+            <p:sp>
+              <p:nvSpPr>
+                <p:cNvPr id="8" name="Rectangle 7">
+                  <a:extLst>
+                    <a:ext uri="{FF2B5EF4-FFF2-40B4-BE49-F238E27FC236}">
+                      <a16:creationId xmlns:a16="http://schemas.microsoft.com/office/drawing/2014/main" id="{5FE31050-4A07-E9C4-CABC-C407F9615698}"/>
+                    </a:ext>
+                  </a:extLst>
+                </p:cNvPr>
+                <p:cNvSpPr/>
+                <p:nvPr/>
+              </p:nvSpPr>
+              <p:spPr>
+                <a:xfrm>
+                  <a:off x="3657600" y="1957774"/>
+                  <a:ext cx="360000" cy="144000"/>
+                </a:xfrm>
+                <a:prstGeom prst="rect">
+                  <a:avLst/>
+                </a:prstGeom>
+                <a:noFill/>
+              </p:spPr>
+              <p:style>
+                <a:lnRef idx="2">
+                  <a:schemeClr val="accent1">
+                    <a:shade val="15000"/>
+                  </a:schemeClr>
+                </a:lnRef>
+                <a:fillRef idx="1">
+                  <a:schemeClr val="accent1"/>
+                </a:fillRef>
+                <a:effectRef idx="0">
+                  <a:schemeClr val="accent1"/>
+                </a:effectRef>
+                <a:fontRef idx="minor">
+                  <a:schemeClr val="lt1"/>
+                </a:fontRef>
+              </p:style>
+              <p:txBody>
+                <a:bodyPr rtlCol="0" anchor="ctr"/>
+                <a:lstStyle/>
+                <a:p>
+                  <a:pPr algn="ctr"/>
+                  <a:endParaRPr lang="en-PH"/>
+                </a:p>
+              </p:txBody>
+            </p:sp>
+            <p:sp>
+              <p:nvSpPr>
+                <p:cNvPr id="9" name="Rectangle 8">
+                  <a:extLst>
+                    <a:ext uri="{FF2B5EF4-FFF2-40B4-BE49-F238E27FC236}">
+                      <a16:creationId xmlns:a16="http://schemas.microsoft.com/office/drawing/2014/main" id="{B0207E53-1745-135A-486E-EEEBA3DD71C7}"/>
+                    </a:ext>
+                  </a:extLst>
+                </p:cNvPr>
+                <p:cNvSpPr/>
+                <p:nvPr/>
+              </p:nvSpPr>
+              <p:spPr>
+                <a:xfrm>
+                  <a:off x="4017600" y="1957774"/>
+                  <a:ext cx="360000" cy="144000"/>
+                </a:xfrm>
+                <a:prstGeom prst="rect">
+                  <a:avLst/>
+                </a:prstGeom>
+                <a:noFill/>
+              </p:spPr>
+              <p:style>
+                <a:lnRef idx="2">
+                  <a:schemeClr val="accent1">
+                    <a:shade val="15000"/>
+                  </a:schemeClr>
+                </a:lnRef>
+                <a:fillRef idx="1">
+                  <a:schemeClr val="accent1"/>
+                </a:fillRef>
+                <a:effectRef idx="0">
+                  <a:schemeClr val="accent1"/>
+                </a:effectRef>
+                <a:fontRef idx="minor">
+                  <a:schemeClr val="lt1"/>
+                </a:fontRef>
+              </p:style>
+              <p:txBody>
+                <a:bodyPr rtlCol="0" anchor="ctr"/>
+                <a:lstStyle/>
+                <a:p>
+                  <a:pPr algn="ctr"/>
+                  <a:endParaRPr lang="en-PH"/>
+                </a:p>
+              </p:txBody>
+            </p:sp>
+            <p:sp>
+              <p:nvSpPr>
+                <p:cNvPr id="10" name="Rectangle 9">
+                  <a:extLst>
+                    <a:ext uri="{FF2B5EF4-FFF2-40B4-BE49-F238E27FC236}">
+                      <a16:creationId xmlns:a16="http://schemas.microsoft.com/office/drawing/2014/main" id="{0FD40C02-556D-E1B1-62CD-CF166DE6AAEA}"/>
+                    </a:ext>
+                  </a:extLst>
+                </p:cNvPr>
+                <p:cNvSpPr/>
+                <p:nvPr/>
+              </p:nvSpPr>
+              <p:spPr>
+                <a:xfrm>
+                  <a:off x="4377600" y="1957774"/>
+                  <a:ext cx="360000" cy="144000"/>
+                </a:xfrm>
+                <a:prstGeom prst="rect">
+                  <a:avLst/>
+                </a:prstGeom>
+                <a:noFill/>
+              </p:spPr>
+              <p:style>
+                <a:lnRef idx="2">
+                  <a:schemeClr val="accent1">
+                    <a:shade val="15000"/>
+                  </a:schemeClr>
+                </a:lnRef>
+                <a:fillRef idx="1">
+                  <a:schemeClr val="accent1"/>
+                </a:fillRef>
+                <a:effectRef idx="0">
+                  <a:schemeClr val="accent1"/>
+                </a:effectRef>
+                <a:fontRef idx="minor">
+                  <a:schemeClr val="lt1"/>
+                </a:fontRef>
+              </p:style>
+              <p:txBody>
+                <a:bodyPr rtlCol="0" anchor="ctr"/>
+                <a:lstStyle/>
+                <a:p>
+                  <a:pPr algn="ctr"/>
+                  <a:endParaRPr lang="en-PH"/>
+                </a:p>
+              </p:txBody>
+            </p:sp>
+            <p:sp>
+              <p:nvSpPr>
+                <p:cNvPr id="11" name="Rectangle 10">
+                  <a:extLst>
+                    <a:ext uri="{FF2B5EF4-FFF2-40B4-BE49-F238E27FC236}">
+                      <a16:creationId xmlns:a16="http://schemas.microsoft.com/office/drawing/2014/main" id="{AFDAD40F-9DEF-14D4-5FC2-21D541FC7799}"/>
+                    </a:ext>
+                  </a:extLst>
+                </p:cNvPr>
+                <p:cNvSpPr/>
+                <p:nvPr/>
+              </p:nvSpPr>
+              <p:spPr>
+                <a:xfrm>
+                  <a:off x="3657600" y="1525774"/>
+                  <a:ext cx="1080000" cy="144000"/>
+                </a:xfrm>
+                <a:prstGeom prst="rect">
+                  <a:avLst/>
+                </a:prstGeom>
+                <a:solidFill>
+                  <a:schemeClr val="accent1"/>
+                </a:solidFill>
+              </p:spPr>
+              <p:style>
+                <a:lnRef idx="2">
+                  <a:schemeClr val="accent1">
+                    <a:shade val="15000"/>
+                  </a:schemeClr>
+                </a:lnRef>
+                <a:fillRef idx="1">
+                  <a:schemeClr val="accent1"/>
+                </a:fillRef>
+                <a:effectRef idx="0">
+                  <a:schemeClr val="accent1"/>
+                </a:effectRef>
+                <a:fontRef idx="minor">
+                  <a:schemeClr val="lt1"/>
+                </a:fontRef>
+              </p:style>
+              <p:txBody>
+                <a:bodyPr rtlCol="0" anchor="ctr"/>
+                <a:lstStyle/>
+                <a:p>
+                  <a:pPr algn="ctr"/>
+                  <a:endParaRPr lang="en-PH"/>
+                </a:p>
+              </p:txBody>
+            </p:sp>
+          </p:grpSp>
+          <p:sp>
+            <p:nvSpPr>
+              <p:cNvPr id="15" name="TextBox 14">
+                <a:extLst>
+                  <a:ext uri="{FF2B5EF4-FFF2-40B4-BE49-F238E27FC236}">
+                    <a16:creationId xmlns:a16="http://schemas.microsoft.com/office/drawing/2014/main" id="{02C50D13-FE7D-C977-7243-2ECC1E0AD973}"/>
+                  </a:ext>
+                </a:extLst>
+              </p:cNvPr>
+              <p:cNvSpPr txBox="1"/>
+              <p:nvPr/>
+            </p:nvSpPr>
+            <p:spPr>
+              <a:xfrm>
+                <a:off x="3657599" y="2101774"/>
+                <a:ext cx="834887" cy="307777"/>
+              </a:xfrm>
+              <a:prstGeom prst="rect">
+                <a:avLst/>
+              </a:prstGeom>
+              <a:noFill/>
+            </p:spPr>
+            <p:txBody>
+              <a:bodyPr wrap="square" rtlCol="0">
+                <a:spAutoFit/>
+              </a:bodyPr>
+              <a:lstStyle/>
+              <a:p>
+                <a:pPr algn="ctr"/>
+                <a:r>
+                  <a:rPr lang="en-PH" sz="1400" dirty="0"/>
+                  <a:t>Train</a:t>
+                </a:r>
+              </a:p>
+            </p:txBody>
+          </p:sp>
+        </p:grpSp>
+        <p:sp>
+          <p:nvSpPr>
+            <p:cNvPr id="43" name="TextBox 42">
+              <a:extLst>
+                <a:ext uri="{FF2B5EF4-FFF2-40B4-BE49-F238E27FC236}">
+                  <a16:creationId xmlns:a16="http://schemas.microsoft.com/office/drawing/2014/main" id="{E69CB222-5D42-F422-2001-4B3657D3A0AB}"/>
+                </a:ext>
+              </a:extLst>
+            </p:cNvPr>
+            <p:cNvSpPr txBox="1"/>
+            <p:nvPr/>
+          </p:nvSpPr>
+          <p:spPr>
+            <a:xfrm>
+              <a:off x="668113" y="2409551"/>
+              <a:ext cx="2460674" cy="369332"/>
+            </a:xfrm>
+            <a:prstGeom prst="rect">
+              <a:avLst/>
+            </a:prstGeom>
+            <a:noFill/>
+          </p:spPr>
+          <p:txBody>
+            <a:bodyPr wrap="none" rtlCol="0">
+              <a:spAutoFit/>
+            </a:bodyPr>
+            <a:lstStyle/>
+            <a:p>
+              <a:pPr algn="ctr"/>
+              <a:r>
+                <a:rPr lang="en-PH" dirty="0"/>
+                <a:t>Used to train ML Model</a:t>
+              </a:r>
+            </a:p>
+          </p:txBody>
+        </p:sp>
+      </p:grpSp>
+      <p:grpSp>
+        <p:nvGrpSpPr>
+          <p:cNvPr id="46" name="Group 45">
+            <a:extLst>
+              <a:ext uri="{FF2B5EF4-FFF2-40B4-BE49-F238E27FC236}">
+                <a16:creationId xmlns:a16="http://schemas.microsoft.com/office/drawing/2014/main" id="{93EE53AC-30AF-1B0B-CCC3-B93B27316C7A}"/>
+              </a:ext>
+            </a:extLst>
+          </p:cNvPr>
+          <p:cNvGrpSpPr/>
+          <p:nvPr/>
+        </p:nvGrpSpPr>
+        <p:grpSpPr>
+          <a:xfrm>
+            <a:off x="4839453" y="1525774"/>
+            <a:ext cx="2176494" cy="1253109"/>
+            <a:chOff x="4099982" y="1525774"/>
+            <a:chExt cx="2176494" cy="1253109"/>
+          </a:xfrm>
+        </p:grpSpPr>
+        <p:grpSp>
+          <p:nvGrpSpPr>
+            <p:cNvPr id="17" name="Group 16">
+              <a:extLst>
+                <a:ext uri="{FF2B5EF4-FFF2-40B4-BE49-F238E27FC236}">
+                  <a16:creationId xmlns:a16="http://schemas.microsoft.com/office/drawing/2014/main" id="{B7041DC1-266E-73FE-6CE7-90912F2299D1}"/>
+                </a:ext>
+              </a:extLst>
+            </p:cNvPr>
+            <p:cNvGrpSpPr/>
+            <p:nvPr/>
+          </p:nvGrpSpPr>
+          <p:grpSpPr>
+            <a:xfrm>
+              <a:off x="4770782" y="1525774"/>
+              <a:ext cx="834888" cy="883777"/>
+              <a:chOff x="3657599" y="1525774"/>
+              <a:chExt cx="834888" cy="883777"/>
+            </a:xfrm>
+          </p:grpSpPr>
+          <p:grpSp>
+            <p:nvGrpSpPr>
+              <p:cNvPr id="18" name="Group 17">
+                <a:extLst>
+                  <a:ext uri="{FF2B5EF4-FFF2-40B4-BE49-F238E27FC236}">
+                    <a16:creationId xmlns:a16="http://schemas.microsoft.com/office/drawing/2014/main" id="{09E468E5-BD9F-C13A-7BC1-83EF58E6E13E}"/>
+                  </a:ext>
+                </a:extLst>
+              </p:cNvPr>
+              <p:cNvGrpSpPr/>
+              <p:nvPr/>
+            </p:nvGrpSpPr>
+            <p:grpSpPr>
+              <a:xfrm>
+                <a:off x="3657600" y="1525774"/>
+                <a:ext cx="834887" cy="576000"/>
+                <a:chOff x="3657600" y="1525774"/>
+                <a:chExt cx="1080000" cy="576000"/>
+              </a:xfrm>
+            </p:grpSpPr>
+            <p:sp>
+              <p:nvSpPr>
+                <p:cNvPr id="20" name="Rectangle 19">
+                  <a:extLst>
+                    <a:ext uri="{FF2B5EF4-FFF2-40B4-BE49-F238E27FC236}">
+                      <a16:creationId xmlns:a16="http://schemas.microsoft.com/office/drawing/2014/main" id="{A48C5074-B717-7729-DB2E-F061C0407D6F}"/>
+                    </a:ext>
+                  </a:extLst>
+                </p:cNvPr>
+                <p:cNvSpPr/>
+                <p:nvPr/>
+              </p:nvSpPr>
+              <p:spPr>
+                <a:xfrm>
+                  <a:off x="3657600" y="1669774"/>
+                  <a:ext cx="360000" cy="144000"/>
+                </a:xfrm>
+                <a:prstGeom prst="rect">
+                  <a:avLst/>
+                </a:prstGeom>
+                <a:noFill/>
+              </p:spPr>
+              <p:style>
+                <a:lnRef idx="2">
+                  <a:schemeClr val="accent1">
+                    <a:shade val="15000"/>
+                  </a:schemeClr>
+                </a:lnRef>
+                <a:fillRef idx="1">
+                  <a:schemeClr val="accent1"/>
+                </a:fillRef>
+                <a:effectRef idx="0">
+                  <a:schemeClr val="accent1"/>
+                </a:effectRef>
+                <a:fontRef idx="minor">
+                  <a:schemeClr val="lt1"/>
+                </a:fontRef>
+              </p:style>
+              <p:txBody>
+                <a:bodyPr rtlCol="0" anchor="ctr"/>
+                <a:lstStyle/>
+                <a:p>
+                  <a:pPr algn="ctr"/>
+                  <a:endParaRPr lang="en-PH"/>
+                </a:p>
+              </p:txBody>
+            </p:sp>
+            <p:sp>
+              <p:nvSpPr>
+                <p:cNvPr id="21" name="Rectangle 20">
+                  <a:extLst>
+                    <a:ext uri="{FF2B5EF4-FFF2-40B4-BE49-F238E27FC236}">
+                      <a16:creationId xmlns:a16="http://schemas.microsoft.com/office/drawing/2014/main" id="{564D0B18-2828-32D4-1614-4EC204DBFF58}"/>
+                    </a:ext>
+                  </a:extLst>
+                </p:cNvPr>
+                <p:cNvSpPr/>
+                <p:nvPr/>
+              </p:nvSpPr>
+              <p:spPr>
+                <a:xfrm>
+                  <a:off x="4017600" y="1669774"/>
+                  <a:ext cx="360000" cy="144000"/>
+                </a:xfrm>
+                <a:prstGeom prst="rect">
+                  <a:avLst/>
+                </a:prstGeom>
+                <a:noFill/>
+              </p:spPr>
+              <p:style>
+                <a:lnRef idx="2">
+                  <a:schemeClr val="accent1">
+                    <a:shade val="15000"/>
+                  </a:schemeClr>
+                </a:lnRef>
+                <a:fillRef idx="1">
+                  <a:schemeClr val="accent1"/>
+                </a:fillRef>
+                <a:effectRef idx="0">
+                  <a:schemeClr val="accent1"/>
+                </a:effectRef>
+                <a:fontRef idx="minor">
+                  <a:schemeClr val="lt1"/>
+                </a:fontRef>
+              </p:style>
+              <p:txBody>
+                <a:bodyPr rtlCol="0" anchor="ctr"/>
+                <a:lstStyle/>
+                <a:p>
+                  <a:pPr algn="ctr"/>
+                  <a:endParaRPr lang="en-PH"/>
+                </a:p>
+              </p:txBody>
+            </p:sp>
+            <p:sp>
+              <p:nvSpPr>
+                <p:cNvPr id="22" name="Rectangle 21">
+                  <a:extLst>
+                    <a:ext uri="{FF2B5EF4-FFF2-40B4-BE49-F238E27FC236}">
+                      <a16:creationId xmlns:a16="http://schemas.microsoft.com/office/drawing/2014/main" id="{D163D763-C7AC-3961-2C48-FDCDC79C7C2A}"/>
+                    </a:ext>
+                  </a:extLst>
+                </p:cNvPr>
+                <p:cNvSpPr/>
+                <p:nvPr/>
+              </p:nvSpPr>
+              <p:spPr>
+                <a:xfrm>
+                  <a:off x="4377600" y="1669774"/>
+                  <a:ext cx="360000" cy="144000"/>
+                </a:xfrm>
+                <a:prstGeom prst="rect">
+                  <a:avLst/>
+                </a:prstGeom>
+                <a:noFill/>
+              </p:spPr>
+              <p:style>
+                <a:lnRef idx="2">
+                  <a:schemeClr val="accent1">
+                    <a:shade val="15000"/>
+                  </a:schemeClr>
+                </a:lnRef>
+                <a:fillRef idx="1">
+                  <a:schemeClr val="accent1"/>
+                </a:fillRef>
+                <a:effectRef idx="0">
+                  <a:schemeClr val="accent1"/>
+                </a:effectRef>
+                <a:fontRef idx="minor">
+                  <a:schemeClr val="lt1"/>
+                </a:fontRef>
+              </p:style>
+              <p:txBody>
+                <a:bodyPr rtlCol="0" anchor="ctr"/>
+                <a:lstStyle/>
+                <a:p>
+                  <a:pPr algn="ctr"/>
+                  <a:endParaRPr lang="en-PH"/>
+                </a:p>
+              </p:txBody>
+            </p:sp>
+            <p:sp>
+              <p:nvSpPr>
+                <p:cNvPr id="23" name="Rectangle 22">
+                  <a:extLst>
+                    <a:ext uri="{FF2B5EF4-FFF2-40B4-BE49-F238E27FC236}">
+                      <a16:creationId xmlns:a16="http://schemas.microsoft.com/office/drawing/2014/main" id="{F37E0B66-E604-34B1-5464-5FC7C948B532}"/>
+                    </a:ext>
+                  </a:extLst>
+                </p:cNvPr>
+                <p:cNvSpPr/>
+                <p:nvPr/>
+              </p:nvSpPr>
+              <p:spPr>
+                <a:xfrm>
+                  <a:off x="3657600" y="1813774"/>
+                  <a:ext cx="360000" cy="144000"/>
+                </a:xfrm>
+                <a:prstGeom prst="rect">
+                  <a:avLst/>
+                </a:prstGeom>
+                <a:noFill/>
+              </p:spPr>
+              <p:style>
+                <a:lnRef idx="2">
+                  <a:schemeClr val="accent1">
+                    <a:shade val="15000"/>
+                  </a:schemeClr>
+                </a:lnRef>
+                <a:fillRef idx="1">
+                  <a:schemeClr val="accent1"/>
+                </a:fillRef>
+                <a:effectRef idx="0">
+                  <a:schemeClr val="accent1"/>
+                </a:effectRef>
+                <a:fontRef idx="minor">
+                  <a:schemeClr val="lt1"/>
+                </a:fontRef>
+              </p:style>
+              <p:txBody>
+                <a:bodyPr rtlCol="0" anchor="ctr"/>
+                <a:lstStyle/>
+                <a:p>
+                  <a:pPr algn="ctr"/>
+                  <a:endParaRPr lang="en-PH"/>
+                </a:p>
+              </p:txBody>
+            </p:sp>
+            <p:sp>
+              <p:nvSpPr>
+                <p:cNvPr id="24" name="Rectangle 23">
+                  <a:extLst>
+                    <a:ext uri="{FF2B5EF4-FFF2-40B4-BE49-F238E27FC236}">
+                      <a16:creationId xmlns:a16="http://schemas.microsoft.com/office/drawing/2014/main" id="{F6FC939F-9B86-1C82-04FF-1F3777A6277F}"/>
+                    </a:ext>
+                  </a:extLst>
+                </p:cNvPr>
+                <p:cNvSpPr/>
+                <p:nvPr/>
+              </p:nvSpPr>
+              <p:spPr>
+                <a:xfrm>
+                  <a:off x="4017600" y="1813774"/>
+                  <a:ext cx="360000" cy="144000"/>
+                </a:xfrm>
+                <a:prstGeom prst="rect">
+                  <a:avLst/>
+                </a:prstGeom>
+                <a:noFill/>
+              </p:spPr>
+              <p:style>
+                <a:lnRef idx="2">
+                  <a:schemeClr val="accent1">
+                    <a:shade val="15000"/>
+                  </a:schemeClr>
+                </a:lnRef>
+                <a:fillRef idx="1">
+                  <a:schemeClr val="accent1"/>
+                </a:fillRef>
+                <a:effectRef idx="0">
+                  <a:schemeClr val="accent1"/>
+                </a:effectRef>
+                <a:fontRef idx="minor">
+                  <a:schemeClr val="lt1"/>
+                </a:fontRef>
+              </p:style>
+              <p:txBody>
+                <a:bodyPr rtlCol="0" anchor="ctr"/>
+                <a:lstStyle/>
+                <a:p>
+                  <a:pPr algn="ctr"/>
+                  <a:endParaRPr lang="en-PH"/>
+                </a:p>
+              </p:txBody>
+            </p:sp>
+            <p:sp>
+              <p:nvSpPr>
+                <p:cNvPr id="25" name="Rectangle 24">
+                  <a:extLst>
+                    <a:ext uri="{FF2B5EF4-FFF2-40B4-BE49-F238E27FC236}">
+                      <a16:creationId xmlns:a16="http://schemas.microsoft.com/office/drawing/2014/main" id="{6711EB85-20D5-8422-D8E7-A2CD070E4FA4}"/>
+                    </a:ext>
+                  </a:extLst>
+                </p:cNvPr>
+                <p:cNvSpPr/>
+                <p:nvPr/>
+              </p:nvSpPr>
+              <p:spPr>
+                <a:xfrm>
+                  <a:off x="4377600" y="1813774"/>
+                  <a:ext cx="360000" cy="144000"/>
+                </a:xfrm>
+                <a:prstGeom prst="rect">
+                  <a:avLst/>
+                </a:prstGeom>
+                <a:noFill/>
+              </p:spPr>
+              <p:style>
+                <a:lnRef idx="2">
+                  <a:schemeClr val="accent1">
+                    <a:shade val="15000"/>
+                  </a:schemeClr>
+                </a:lnRef>
+                <a:fillRef idx="1">
+                  <a:schemeClr val="accent1"/>
+                </a:fillRef>
+                <a:effectRef idx="0">
+                  <a:schemeClr val="accent1"/>
+                </a:effectRef>
+                <a:fontRef idx="minor">
+                  <a:schemeClr val="lt1"/>
+                </a:fontRef>
+              </p:style>
+              <p:txBody>
+                <a:bodyPr rtlCol="0" anchor="ctr"/>
+                <a:lstStyle/>
+                <a:p>
+                  <a:pPr algn="ctr"/>
+                  <a:endParaRPr lang="en-PH"/>
+                </a:p>
+              </p:txBody>
+            </p:sp>
+            <p:sp>
+              <p:nvSpPr>
+                <p:cNvPr id="26" name="Rectangle 25">
+                  <a:extLst>
+                    <a:ext uri="{FF2B5EF4-FFF2-40B4-BE49-F238E27FC236}">
+                      <a16:creationId xmlns:a16="http://schemas.microsoft.com/office/drawing/2014/main" id="{99523FB1-641E-6921-FCD7-FFCDF0FD3A61}"/>
+                    </a:ext>
+                  </a:extLst>
+                </p:cNvPr>
+                <p:cNvSpPr/>
+                <p:nvPr/>
+              </p:nvSpPr>
+              <p:spPr>
+                <a:xfrm>
+                  <a:off x="3657600" y="1957774"/>
+                  <a:ext cx="360000" cy="144000"/>
+                </a:xfrm>
+                <a:prstGeom prst="rect">
+                  <a:avLst/>
+                </a:prstGeom>
+                <a:noFill/>
+              </p:spPr>
+              <p:style>
+                <a:lnRef idx="2">
+                  <a:schemeClr val="accent1">
+                    <a:shade val="15000"/>
+                  </a:schemeClr>
+                </a:lnRef>
+                <a:fillRef idx="1">
+                  <a:schemeClr val="accent1"/>
+                </a:fillRef>
+                <a:effectRef idx="0">
+                  <a:schemeClr val="accent1"/>
+                </a:effectRef>
+                <a:fontRef idx="minor">
+                  <a:schemeClr val="lt1"/>
+                </a:fontRef>
+              </p:style>
+              <p:txBody>
+                <a:bodyPr rtlCol="0" anchor="ctr"/>
+                <a:lstStyle/>
+                <a:p>
+                  <a:pPr algn="ctr"/>
+                  <a:endParaRPr lang="en-PH"/>
+                </a:p>
+              </p:txBody>
+            </p:sp>
+            <p:sp>
+              <p:nvSpPr>
+                <p:cNvPr id="27" name="Rectangle 26">
+                  <a:extLst>
+                    <a:ext uri="{FF2B5EF4-FFF2-40B4-BE49-F238E27FC236}">
+                      <a16:creationId xmlns:a16="http://schemas.microsoft.com/office/drawing/2014/main" id="{34D0C885-B066-EA6C-A88E-AD85C365FB4E}"/>
+                    </a:ext>
+                  </a:extLst>
+                </p:cNvPr>
+                <p:cNvSpPr/>
+                <p:nvPr/>
+              </p:nvSpPr>
+              <p:spPr>
+                <a:xfrm>
+                  <a:off x="4017600" y="1957774"/>
+                  <a:ext cx="360000" cy="144000"/>
+                </a:xfrm>
+                <a:prstGeom prst="rect">
+                  <a:avLst/>
+                </a:prstGeom>
+                <a:noFill/>
+              </p:spPr>
+              <p:style>
+                <a:lnRef idx="2">
+                  <a:schemeClr val="accent1">
+                    <a:shade val="15000"/>
+                  </a:schemeClr>
+                </a:lnRef>
+                <a:fillRef idx="1">
+                  <a:schemeClr val="accent1"/>
+                </a:fillRef>
+                <a:effectRef idx="0">
+                  <a:schemeClr val="accent1"/>
+                </a:effectRef>
+                <a:fontRef idx="minor">
+                  <a:schemeClr val="lt1"/>
+                </a:fontRef>
+              </p:style>
+              <p:txBody>
+                <a:bodyPr rtlCol="0" anchor="ctr"/>
+                <a:lstStyle/>
+                <a:p>
+                  <a:pPr algn="ctr"/>
+                  <a:endParaRPr lang="en-PH"/>
+                </a:p>
+              </p:txBody>
+            </p:sp>
+            <p:sp>
+              <p:nvSpPr>
+                <p:cNvPr id="28" name="Rectangle 27">
+                  <a:extLst>
+                    <a:ext uri="{FF2B5EF4-FFF2-40B4-BE49-F238E27FC236}">
+                      <a16:creationId xmlns:a16="http://schemas.microsoft.com/office/drawing/2014/main" id="{DCDDC1F9-372A-4E45-A9F5-1709A111B91D}"/>
+                    </a:ext>
+                  </a:extLst>
+                </p:cNvPr>
+                <p:cNvSpPr/>
+                <p:nvPr/>
+              </p:nvSpPr>
+              <p:spPr>
+                <a:xfrm>
+                  <a:off x="4377600" y="1957774"/>
+                  <a:ext cx="360000" cy="144000"/>
+                </a:xfrm>
+                <a:prstGeom prst="rect">
+                  <a:avLst/>
+                </a:prstGeom>
+                <a:noFill/>
+              </p:spPr>
+              <p:style>
+                <a:lnRef idx="2">
+                  <a:schemeClr val="accent1">
+                    <a:shade val="15000"/>
+                  </a:schemeClr>
+                </a:lnRef>
+                <a:fillRef idx="1">
+                  <a:schemeClr val="accent1"/>
+                </a:fillRef>
+                <a:effectRef idx="0">
+                  <a:schemeClr val="accent1"/>
+                </a:effectRef>
+                <a:fontRef idx="minor">
+                  <a:schemeClr val="lt1"/>
+                </a:fontRef>
+              </p:style>
+              <p:txBody>
+                <a:bodyPr rtlCol="0" anchor="ctr"/>
+                <a:lstStyle/>
+                <a:p>
+                  <a:pPr algn="ctr"/>
+                  <a:endParaRPr lang="en-PH"/>
+                </a:p>
+              </p:txBody>
+            </p:sp>
+            <p:sp>
+              <p:nvSpPr>
+                <p:cNvPr id="29" name="Rectangle 28">
+                  <a:extLst>
+                    <a:ext uri="{FF2B5EF4-FFF2-40B4-BE49-F238E27FC236}">
+                      <a16:creationId xmlns:a16="http://schemas.microsoft.com/office/drawing/2014/main" id="{28093B9E-CB2C-EFD7-B366-59B1553434AB}"/>
+                    </a:ext>
+                  </a:extLst>
+                </p:cNvPr>
+                <p:cNvSpPr/>
+                <p:nvPr/>
+              </p:nvSpPr>
+              <p:spPr>
+                <a:xfrm>
+                  <a:off x="3657600" y="1525774"/>
+                  <a:ext cx="1080000" cy="144000"/>
+                </a:xfrm>
+                <a:prstGeom prst="rect">
+                  <a:avLst/>
+                </a:prstGeom>
+                <a:solidFill>
+                  <a:schemeClr val="accent1"/>
+                </a:solidFill>
+              </p:spPr>
+              <p:style>
+                <a:lnRef idx="2">
+                  <a:schemeClr val="accent1">
+                    <a:shade val="15000"/>
+                  </a:schemeClr>
+                </a:lnRef>
+                <a:fillRef idx="1">
+                  <a:schemeClr val="accent1"/>
+                </a:fillRef>
+                <a:effectRef idx="0">
+                  <a:schemeClr val="accent1"/>
+                </a:effectRef>
+                <a:fontRef idx="minor">
+                  <a:schemeClr val="lt1"/>
+                </a:fontRef>
+              </p:style>
+              <p:txBody>
+                <a:bodyPr rtlCol="0" anchor="ctr"/>
+                <a:lstStyle/>
+                <a:p>
+                  <a:pPr algn="ctr"/>
+                  <a:endParaRPr lang="en-PH"/>
+                </a:p>
+              </p:txBody>
+            </p:sp>
+          </p:grpSp>
+          <p:sp>
+            <p:nvSpPr>
+              <p:cNvPr id="19" name="TextBox 18">
+                <a:extLst>
+                  <a:ext uri="{FF2B5EF4-FFF2-40B4-BE49-F238E27FC236}">
+                    <a16:creationId xmlns:a16="http://schemas.microsoft.com/office/drawing/2014/main" id="{926088BF-5D0C-39E6-76EF-BE74BD7C65D6}"/>
+                  </a:ext>
+                </a:extLst>
+              </p:cNvPr>
+              <p:cNvSpPr txBox="1"/>
+              <p:nvPr/>
+            </p:nvSpPr>
+            <p:spPr>
+              <a:xfrm>
+                <a:off x="3657599" y="2101774"/>
+                <a:ext cx="834887" cy="307777"/>
+              </a:xfrm>
+              <a:prstGeom prst="rect">
+                <a:avLst/>
+              </a:prstGeom>
+              <a:noFill/>
+            </p:spPr>
+            <p:txBody>
+              <a:bodyPr wrap="square" rtlCol="0">
+                <a:spAutoFit/>
+              </a:bodyPr>
+              <a:lstStyle/>
+              <a:p>
+                <a:pPr algn="ctr"/>
+                <a:r>
+                  <a:rPr lang="en-PH" sz="1400" dirty="0"/>
+                  <a:t>Scoring</a:t>
+                </a:r>
+              </a:p>
+            </p:txBody>
+          </p:sp>
+        </p:grpSp>
+        <p:sp>
+          <p:nvSpPr>
+            <p:cNvPr id="45" name="TextBox 44">
+              <a:extLst>
+                <a:ext uri="{FF2B5EF4-FFF2-40B4-BE49-F238E27FC236}">
+                  <a16:creationId xmlns:a16="http://schemas.microsoft.com/office/drawing/2014/main" id="{74959BC3-614D-6702-640A-A7C70DBD903A}"/>
+                </a:ext>
+              </a:extLst>
+            </p:cNvPr>
+            <p:cNvSpPr txBox="1"/>
+            <p:nvPr/>
+          </p:nvSpPr>
+          <p:spPr>
+            <a:xfrm>
+              <a:off x="4099982" y="2409551"/>
+              <a:ext cx="2176494" cy="369332"/>
+            </a:xfrm>
+            <a:prstGeom prst="rect">
+              <a:avLst/>
+            </a:prstGeom>
+            <a:noFill/>
+          </p:spPr>
+          <p:txBody>
+            <a:bodyPr wrap="none" rtlCol="0">
+              <a:spAutoFit/>
+            </a:bodyPr>
+            <a:lstStyle/>
+            <a:p>
+              <a:pPr algn="ctr"/>
+              <a:r>
+                <a:rPr lang="en-PH" dirty="0"/>
+                <a:t>Customers To Score</a:t>
+              </a:r>
+            </a:p>
+          </p:txBody>
+        </p:sp>
+      </p:grpSp>
+      <p:grpSp>
+        <p:nvGrpSpPr>
+          <p:cNvPr id="48" name="Group 47">
+            <a:extLst>
+              <a:ext uri="{FF2B5EF4-FFF2-40B4-BE49-F238E27FC236}">
+                <a16:creationId xmlns:a16="http://schemas.microsoft.com/office/drawing/2014/main" id="{0625B010-5FDE-7294-195E-B0612C577642}"/>
+              </a:ext>
+            </a:extLst>
+          </p:cNvPr>
+          <p:cNvGrpSpPr/>
+          <p:nvPr/>
+        </p:nvGrpSpPr>
+        <p:grpSpPr>
+          <a:xfrm>
+            <a:off x="8455514" y="1528111"/>
+            <a:ext cx="1919886" cy="1206942"/>
+            <a:chOff x="7176648" y="1525774"/>
+            <a:chExt cx="1919886" cy="1206942"/>
+          </a:xfrm>
+        </p:grpSpPr>
+        <p:grpSp>
+          <p:nvGrpSpPr>
+            <p:cNvPr id="30" name="Group 29">
+              <a:extLst>
+                <a:ext uri="{FF2B5EF4-FFF2-40B4-BE49-F238E27FC236}">
+                  <a16:creationId xmlns:a16="http://schemas.microsoft.com/office/drawing/2014/main" id="{FCD17EDB-27FC-30BD-B1A8-D9E90984C3D1}"/>
+                </a:ext>
+              </a:extLst>
+            </p:cNvPr>
+            <p:cNvGrpSpPr/>
+            <p:nvPr/>
+          </p:nvGrpSpPr>
+          <p:grpSpPr>
+            <a:xfrm>
+              <a:off x="7716043" y="1525774"/>
+              <a:ext cx="834888" cy="883777"/>
+              <a:chOff x="3657599" y="1525774"/>
+              <a:chExt cx="834888" cy="883777"/>
+            </a:xfrm>
+          </p:grpSpPr>
+          <p:grpSp>
+            <p:nvGrpSpPr>
+              <p:cNvPr id="31" name="Group 30">
+                <a:extLst>
+                  <a:ext uri="{FF2B5EF4-FFF2-40B4-BE49-F238E27FC236}">
+                    <a16:creationId xmlns:a16="http://schemas.microsoft.com/office/drawing/2014/main" id="{A2430A59-C070-F898-0ED7-C39CC02713D0}"/>
+                  </a:ext>
+                </a:extLst>
+              </p:cNvPr>
+              <p:cNvGrpSpPr/>
+              <p:nvPr/>
+            </p:nvGrpSpPr>
+            <p:grpSpPr>
+              <a:xfrm>
+                <a:off x="3657600" y="1525774"/>
+                <a:ext cx="834887" cy="576000"/>
+                <a:chOff x="3657600" y="1525774"/>
+                <a:chExt cx="1080000" cy="576000"/>
+              </a:xfrm>
+            </p:grpSpPr>
+            <p:sp>
+              <p:nvSpPr>
+                <p:cNvPr id="33" name="Rectangle 32">
+                  <a:extLst>
+                    <a:ext uri="{FF2B5EF4-FFF2-40B4-BE49-F238E27FC236}">
+                      <a16:creationId xmlns:a16="http://schemas.microsoft.com/office/drawing/2014/main" id="{EECEC6C0-176E-CE22-F907-1147DED9E28E}"/>
+                    </a:ext>
+                  </a:extLst>
+                </p:cNvPr>
+                <p:cNvSpPr/>
+                <p:nvPr/>
+              </p:nvSpPr>
+              <p:spPr>
+                <a:xfrm>
+                  <a:off x="3657600" y="1669774"/>
+                  <a:ext cx="360000" cy="144000"/>
+                </a:xfrm>
+                <a:prstGeom prst="rect">
+                  <a:avLst/>
+                </a:prstGeom>
+                <a:noFill/>
+              </p:spPr>
+              <p:style>
+                <a:lnRef idx="2">
+                  <a:schemeClr val="accent1">
+                    <a:shade val="15000"/>
+                  </a:schemeClr>
+                </a:lnRef>
+                <a:fillRef idx="1">
+                  <a:schemeClr val="accent1"/>
+                </a:fillRef>
+                <a:effectRef idx="0">
+                  <a:schemeClr val="accent1"/>
+                </a:effectRef>
+                <a:fontRef idx="minor">
+                  <a:schemeClr val="lt1"/>
+                </a:fontRef>
+              </p:style>
+              <p:txBody>
+                <a:bodyPr rtlCol="0" anchor="ctr"/>
+                <a:lstStyle/>
+                <a:p>
+                  <a:pPr algn="ctr"/>
+                  <a:endParaRPr lang="en-PH"/>
+                </a:p>
+              </p:txBody>
+            </p:sp>
+            <p:sp>
+              <p:nvSpPr>
+                <p:cNvPr id="34" name="Rectangle 33">
+                  <a:extLst>
+                    <a:ext uri="{FF2B5EF4-FFF2-40B4-BE49-F238E27FC236}">
+                      <a16:creationId xmlns:a16="http://schemas.microsoft.com/office/drawing/2014/main" id="{77DEF39B-0C32-794C-753C-10477C918771}"/>
+                    </a:ext>
+                  </a:extLst>
+                </p:cNvPr>
+                <p:cNvSpPr/>
+                <p:nvPr/>
+              </p:nvSpPr>
+              <p:spPr>
+                <a:xfrm>
+                  <a:off x="4017600" y="1669774"/>
+                  <a:ext cx="360000" cy="144000"/>
+                </a:xfrm>
+                <a:prstGeom prst="rect">
+                  <a:avLst/>
+                </a:prstGeom>
+                <a:noFill/>
+              </p:spPr>
+              <p:style>
+                <a:lnRef idx="2">
+                  <a:schemeClr val="accent1">
+                    <a:shade val="15000"/>
+                  </a:schemeClr>
+                </a:lnRef>
+                <a:fillRef idx="1">
+                  <a:schemeClr val="accent1"/>
+                </a:fillRef>
+                <a:effectRef idx="0">
+                  <a:schemeClr val="accent1"/>
+                </a:effectRef>
+                <a:fontRef idx="minor">
+                  <a:schemeClr val="lt1"/>
+                </a:fontRef>
+              </p:style>
+              <p:txBody>
+                <a:bodyPr rtlCol="0" anchor="ctr"/>
+                <a:lstStyle/>
+                <a:p>
+                  <a:pPr algn="ctr"/>
+                  <a:endParaRPr lang="en-PH"/>
+                </a:p>
+              </p:txBody>
+            </p:sp>
+            <p:sp>
+              <p:nvSpPr>
+                <p:cNvPr id="35" name="Rectangle 34">
+                  <a:extLst>
+                    <a:ext uri="{FF2B5EF4-FFF2-40B4-BE49-F238E27FC236}">
+                      <a16:creationId xmlns:a16="http://schemas.microsoft.com/office/drawing/2014/main" id="{B890653D-25E1-38CF-DF59-F8172DD8847D}"/>
+                    </a:ext>
+                  </a:extLst>
+                </p:cNvPr>
+                <p:cNvSpPr/>
+                <p:nvPr/>
+              </p:nvSpPr>
+              <p:spPr>
+                <a:xfrm>
+                  <a:off x="4377600" y="1669774"/>
+                  <a:ext cx="360000" cy="144000"/>
+                </a:xfrm>
+                <a:prstGeom prst="rect">
+                  <a:avLst/>
+                </a:prstGeom>
+                <a:noFill/>
+              </p:spPr>
+              <p:style>
+                <a:lnRef idx="2">
+                  <a:schemeClr val="accent1">
+                    <a:shade val="15000"/>
+                  </a:schemeClr>
+                </a:lnRef>
+                <a:fillRef idx="1">
+                  <a:schemeClr val="accent1"/>
+                </a:fillRef>
+                <a:effectRef idx="0">
+                  <a:schemeClr val="accent1"/>
+                </a:effectRef>
+                <a:fontRef idx="minor">
+                  <a:schemeClr val="lt1"/>
+                </a:fontRef>
+              </p:style>
+              <p:txBody>
+                <a:bodyPr rtlCol="0" anchor="ctr"/>
+                <a:lstStyle/>
+                <a:p>
+                  <a:pPr algn="ctr"/>
+                  <a:endParaRPr lang="en-PH"/>
+                </a:p>
+              </p:txBody>
+            </p:sp>
+            <p:sp>
+              <p:nvSpPr>
+                <p:cNvPr id="36" name="Rectangle 35">
+                  <a:extLst>
+                    <a:ext uri="{FF2B5EF4-FFF2-40B4-BE49-F238E27FC236}">
+                      <a16:creationId xmlns:a16="http://schemas.microsoft.com/office/drawing/2014/main" id="{A5D49691-8A4B-5CBE-29E4-12AB12E85B2C}"/>
+                    </a:ext>
+                  </a:extLst>
+                </p:cNvPr>
+                <p:cNvSpPr/>
+                <p:nvPr/>
+              </p:nvSpPr>
+              <p:spPr>
+                <a:xfrm>
+                  <a:off x="3657600" y="1813774"/>
+                  <a:ext cx="360000" cy="144000"/>
+                </a:xfrm>
+                <a:prstGeom prst="rect">
+                  <a:avLst/>
+                </a:prstGeom>
+                <a:noFill/>
+              </p:spPr>
+              <p:style>
+                <a:lnRef idx="2">
+                  <a:schemeClr val="accent1">
+                    <a:shade val="15000"/>
+                  </a:schemeClr>
+                </a:lnRef>
+                <a:fillRef idx="1">
+                  <a:schemeClr val="accent1"/>
+                </a:fillRef>
+                <a:effectRef idx="0">
+                  <a:schemeClr val="accent1"/>
+                </a:effectRef>
+                <a:fontRef idx="minor">
+                  <a:schemeClr val="lt1"/>
+                </a:fontRef>
+              </p:style>
+              <p:txBody>
+                <a:bodyPr rtlCol="0" anchor="ctr"/>
+                <a:lstStyle/>
+                <a:p>
+                  <a:pPr algn="ctr"/>
+                  <a:endParaRPr lang="en-PH"/>
+                </a:p>
+              </p:txBody>
+            </p:sp>
+            <p:sp>
+              <p:nvSpPr>
+                <p:cNvPr id="37" name="Rectangle 36">
+                  <a:extLst>
+                    <a:ext uri="{FF2B5EF4-FFF2-40B4-BE49-F238E27FC236}">
+                      <a16:creationId xmlns:a16="http://schemas.microsoft.com/office/drawing/2014/main" id="{F8991699-8665-ABAF-4E5B-73E26F59AB35}"/>
+                    </a:ext>
+                  </a:extLst>
+                </p:cNvPr>
+                <p:cNvSpPr/>
+                <p:nvPr/>
+              </p:nvSpPr>
+              <p:spPr>
+                <a:xfrm>
+                  <a:off x="4017600" y="1813774"/>
+                  <a:ext cx="360000" cy="144000"/>
+                </a:xfrm>
+                <a:prstGeom prst="rect">
+                  <a:avLst/>
+                </a:prstGeom>
+                <a:noFill/>
+              </p:spPr>
+              <p:style>
+                <a:lnRef idx="2">
+                  <a:schemeClr val="accent1">
+                    <a:shade val="15000"/>
+                  </a:schemeClr>
+                </a:lnRef>
+                <a:fillRef idx="1">
+                  <a:schemeClr val="accent1"/>
+                </a:fillRef>
+                <a:effectRef idx="0">
+                  <a:schemeClr val="accent1"/>
+                </a:effectRef>
+                <a:fontRef idx="minor">
+                  <a:schemeClr val="lt1"/>
+                </a:fontRef>
+              </p:style>
+              <p:txBody>
+                <a:bodyPr rtlCol="0" anchor="ctr"/>
+                <a:lstStyle/>
+                <a:p>
+                  <a:pPr algn="ctr"/>
+                  <a:endParaRPr lang="en-PH"/>
+                </a:p>
+              </p:txBody>
+            </p:sp>
+            <p:sp>
+              <p:nvSpPr>
+                <p:cNvPr id="38" name="Rectangle 37">
+                  <a:extLst>
+                    <a:ext uri="{FF2B5EF4-FFF2-40B4-BE49-F238E27FC236}">
+                      <a16:creationId xmlns:a16="http://schemas.microsoft.com/office/drawing/2014/main" id="{E61A7365-57E5-5208-1CCD-2B1B2B987CCF}"/>
+                    </a:ext>
+                  </a:extLst>
+                </p:cNvPr>
+                <p:cNvSpPr/>
+                <p:nvPr/>
+              </p:nvSpPr>
+              <p:spPr>
+                <a:xfrm>
+                  <a:off x="4377600" y="1813774"/>
+                  <a:ext cx="360000" cy="144000"/>
+                </a:xfrm>
+                <a:prstGeom prst="rect">
+                  <a:avLst/>
+                </a:prstGeom>
+                <a:noFill/>
+              </p:spPr>
+              <p:style>
+                <a:lnRef idx="2">
+                  <a:schemeClr val="accent1">
+                    <a:shade val="15000"/>
+                  </a:schemeClr>
+                </a:lnRef>
+                <a:fillRef idx="1">
+                  <a:schemeClr val="accent1"/>
+                </a:fillRef>
+                <a:effectRef idx="0">
+                  <a:schemeClr val="accent1"/>
+                </a:effectRef>
+                <a:fontRef idx="minor">
+                  <a:schemeClr val="lt1"/>
+                </a:fontRef>
+              </p:style>
+              <p:txBody>
+                <a:bodyPr rtlCol="0" anchor="ctr"/>
+                <a:lstStyle/>
+                <a:p>
+                  <a:pPr algn="ctr"/>
+                  <a:endParaRPr lang="en-PH"/>
+                </a:p>
+              </p:txBody>
+            </p:sp>
+            <p:sp>
+              <p:nvSpPr>
+                <p:cNvPr id="39" name="Rectangle 38">
+                  <a:extLst>
+                    <a:ext uri="{FF2B5EF4-FFF2-40B4-BE49-F238E27FC236}">
+                      <a16:creationId xmlns:a16="http://schemas.microsoft.com/office/drawing/2014/main" id="{8E253CCF-DE27-66B7-B4C6-7E37FDA36E11}"/>
+                    </a:ext>
+                  </a:extLst>
+                </p:cNvPr>
+                <p:cNvSpPr/>
+                <p:nvPr/>
+              </p:nvSpPr>
+              <p:spPr>
+                <a:xfrm>
+                  <a:off x="3657600" y="1957774"/>
+                  <a:ext cx="360000" cy="144000"/>
+                </a:xfrm>
+                <a:prstGeom prst="rect">
+                  <a:avLst/>
+                </a:prstGeom>
+                <a:noFill/>
+              </p:spPr>
+              <p:style>
+                <a:lnRef idx="2">
+                  <a:schemeClr val="accent1">
+                    <a:shade val="15000"/>
+                  </a:schemeClr>
+                </a:lnRef>
+                <a:fillRef idx="1">
+                  <a:schemeClr val="accent1"/>
+                </a:fillRef>
+                <a:effectRef idx="0">
+                  <a:schemeClr val="accent1"/>
+                </a:effectRef>
+                <a:fontRef idx="minor">
+                  <a:schemeClr val="lt1"/>
+                </a:fontRef>
+              </p:style>
+              <p:txBody>
+                <a:bodyPr rtlCol="0" anchor="ctr"/>
+                <a:lstStyle/>
+                <a:p>
+                  <a:pPr algn="ctr"/>
+                  <a:endParaRPr lang="en-PH"/>
+                </a:p>
+              </p:txBody>
+            </p:sp>
+            <p:sp>
+              <p:nvSpPr>
+                <p:cNvPr id="40" name="Rectangle 39">
+                  <a:extLst>
+                    <a:ext uri="{FF2B5EF4-FFF2-40B4-BE49-F238E27FC236}">
+                      <a16:creationId xmlns:a16="http://schemas.microsoft.com/office/drawing/2014/main" id="{45645142-408F-153A-3E61-6B74E5D55066}"/>
+                    </a:ext>
+                  </a:extLst>
+                </p:cNvPr>
+                <p:cNvSpPr/>
+                <p:nvPr/>
+              </p:nvSpPr>
+              <p:spPr>
+                <a:xfrm>
+                  <a:off x="4017600" y="1957774"/>
+                  <a:ext cx="360000" cy="144000"/>
+                </a:xfrm>
+                <a:prstGeom prst="rect">
+                  <a:avLst/>
+                </a:prstGeom>
+                <a:noFill/>
+              </p:spPr>
+              <p:style>
+                <a:lnRef idx="2">
+                  <a:schemeClr val="accent1">
+                    <a:shade val="15000"/>
+                  </a:schemeClr>
+                </a:lnRef>
+                <a:fillRef idx="1">
+                  <a:schemeClr val="accent1"/>
+                </a:fillRef>
+                <a:effectRef idx="0">
+                  <a:schemeClr val="accent1"/>
+                </a:effectRef>
+                <a:fontRef idx="minor">
+                  <a:schemeClr val="lt1"/>
+                </a:fontRef>
+              </p:style>
+              <p:txBody>
+                <a:bodyPr rtlCol="0" anchor="ctr"/>
+                <a:lstStyle/>
+                <a:p>
+                  <a:pPr algn="ctr"/>
+                  <a:endParaRPr lang="en-PH"/>
+                </a:p>
+              </p:txBody>
+            </p:sp>
+            <p:sp>
+              <p:nvSpPr>
+                <p:cNvPr id="41" name="Rectangle 40">
+                  <a:extLst>
+                    <a:ext uri="{FF2B5EF4-FFF2-40B4-BE49-F238E27FC236}">
+                      <a16:creationId xmlns:a16="http://schemas.microsoft.com/office/drawing/2014/main" id="{36772AEE-C1B1-F2E2-7792-FCA5B53867B7}"/>
+                    </a:ext>
+                  </a:extLst>
+                </p:cNvPr>
+                <p:cNvSpPr/>
+                <p:nvPr/>
+              </p:nvSpPr>
+              <p:spPr>
+                <a:xfrm>
+                  <a:off x="4377600" y="1957774"/>
+                  <a:ext cx="360000" cy="144000"/>
+                </a:xfrm>
+                <a:prstGeom prst="rect">
+                  <a:avLst/>
+                </a:prstGeom>
+                <a:noFill/>
+              </p:spPr>
+              <p:style>
+                <a:lnRef idx="2">
+                  <a:schemeClr val="accent1">
+                    <a:shade val="15000"/>
+                  </a:schemeClr>
+                </a:lnRef>
+                <a:fillRef idx="1">
+                  <a:schemeClr val="accent1"/>
+                </a:fillRef>
+                <a:effectRef idx="0">
+                  <a:schemeClr val="accent1"/>
+                </a:effectRef>
+                <a:fontRef idx="minor">
+                  <a:schemeClr val="lt1"/>
+                </a:fontRef>
+              </p:style>
+              <p:txBody>
+                <a:bodyPr rtlCol="0" anchor="ctr"/>
+                <a:lstStyle/>
+                <a:p>
+                  <a:pPr algn="ctr"/>
+                  <a:endParaRPr lang="en-PH"/>
+                </a:p>
+              </p:txBody>
+            </p:sp>
+            <p:sp>
+              <p:nvSpPr>
+                <p:cNvPr id="42" name="Rectangle 41">
+                  <a:extLst>
+                    <a:ext uri="{FF2B5EF4-FFF2-40B4-BE49-F238E27FC236}">
+                      <a16:creationId xmlns:a16="http://schemas.microsoft.com/office/drawing/2014/main" id="{30452231-F7C9-394C-FFED-D9FBC34E28AF}"/>
+                    </a:ext>
+                  </a:extLst>
+                </p:cNvPr>
+                <p:cNvSpPr/>
+                <p:nvPr/>
+              </p:nvSpPr>
+              <p:spPr>
+                <a:xfrm>
+                  <a:off x="3657600" y="1525774"/>
+                  <a:ext cx="1080000" cy="144000"/>
+                </a:xfrm>
+                <a:prstGeom prst="rect">
+                  <a:avLst/>
+                </a:prstGeom>
+                <a:solidFill>
+                  <a:schemeClr val="accent1"/>
+                </a:solidFill>
+              </p:spPr>
+              <p:style>
+                <a:lnRef idx="2">
+                  <a:schemeClr val="accent1">
+                    <a:shade val="15000"/>
+                  </a:schemeClr>
+                </a:lnRef>
+                <a:fillRef idx="1">
+                  <a:schemeClr val="accent1"/>
+                </a:fillRef>
+                <a:effectRef idx="0">
+                  <a:schemeClr val="accent1"/>
+                </a:effectRef>
+                <a:fontRef idx="minor">
+                  <a:schemeClr val="lt1"/>
+                </a:fontRef>
+              </p:style>
+              <p:txBody>
+                <a:bodyPr rtlCol="0" anchor="ctr"/>
+                <a:lstStyle/>
+                <a:p>
+                  <a:pPr algn="ctr"/>
+                  <a:endParaRPr lang="en-PH"/>
+                </a:p>
+              </p:txBody>
+            </p:sp>
+          </p:grpSp>
+          <p:sp>
+            <p:nvSpPr>
+              <p:cNvPr id="32" name="TextBox 31">
+                <a:extLst>
+                  <a:ext uri="{FF2B5EF4-FFF2-40B4-BE49-F238E27FC236}">
+                    <a16:creationId xmlns:a16="http://schemas.microsoft.com/office/drawing/2014/main" id="{E8CF9E67-9E21-8987-5844-657C59BA9992}"/>
+                  </a:ext>
+                </a:extLst>
+              </p:cNvPr>
+              <p:cNvSpPr txBox="1"/>
+              <p:nvPr/>
+            </p:nvSpPr>
+            <p:spPr>
+              <a:xfrm>
+                <a:off x="3657599" y="2101774"/>
+                <a:ext cx="834887" cy="307777"/>
+              </a:xfrm>
+              <a:prstGeom prst="rect">
+                <a:avLst/>
+              </a:prstGeom>
+              <a:noFill/>
+            </p:spPr>
+            <p:txBody>
+              <a:bodyPr wrap="square" rtlCol="0">
+                <a:spAutoFit/>
+              </a:bodyPr>
+              <a:lstStyle/>
+              <a:p>
+                <a:pPr algn="ctr"/>
+                <a:r>
+                  <a:rPr lang="en-PH" sz="1400" dirty="0"/>
+                  <a:t>Emails</a:t>
+                </a:r>
+              </a:p>
+            </p:txBody>
+          </p:sp>
+        </p:grpSp>
+        <p:sp>
+          <p:nvSpPr>
+            <p:cNvPr id="47" name="TextBox 46">
+              <a:extLst>
+                <a:ext uri="{FF2B5EF4-FFF2-40B4-BE49-F238E27FC236}">
+                  <a16:creationId xmlns:a16="http://schemas.microsoft.com/office/drawing/2014/main" id="{45674156-A810-22F2-5131-382DA9E89DE0}"/>
+                </a:ext>
+              </a:extLst>
+            </p:cNvPr>
+            <p:cNvSpPr txBox="1"/>
+            <p:nvPr/>
+          </p:nvSpPr>
+          <p:spPr>
+            <a:xfrm>
+              <a:off x="7176648" y="2363384"/>
+              <a:ext cx="1919886" cy="369332"/>
+            </a:xfrm>
+            <a:prstGeom prst="rect">
+              <a:avLst/>
+            </a:prstGeom>
+            <a:noFill/>
+          </p:spPr>
+          <p:txBody>
+            <a:bodyPr wrap="none" rtlCol="0">
+              <a:spAutoFit/>
+            </a:bodyPr>
+            <a:lstStyle/>
+            <a:p>
+              <a:pPr algn="ctr"/>
+              <a:r>
+                <a:rPr lang="en-PH" dirty="0"/>
+                <a:t>Emails To Scoring</a:t>
+              </a:r>
+            </a:p>
+          </p:txBody>
+        </p:sp>
+      </p:grpSp>
+      <p:grpSp>
+        <p:nvGrpSpPr>
+          <p:cNvPr id="50" name="Group 49">
+            <a:extLst>
+              <a:ext uri="{FF2B5EF4-FFF2-40B4-BE49-F238E27FC236}">
+                <a16:creationId xmlns:a16="http://schemas.microsoft.com/office/drawing/2014/main" id="{D72ACDB1-FDE8-E641-086A-0A98BCE5D9D6}"/>
+              </a:ext>
+            </a:extLst>
+          </p:cNvPr>
+          <p:cNvGrpSpPr/>
+          <p:nvPr/>
+        </p:nvGrpSpPr>
+        <p:grpSpPr>
+          <a:xfrm>
+            <a:off x="1915384" y="2841551"/>
+            <a:ext cx="1445073" cy="883777"/>
+            <a:chOff x="3352505" y="1525774"/>
+            <a:chExt cx="1445073" cy="883777"/>
+          </a:xfrm>
+        </p:grpSpPr>
+        <p:grpSp>
+          <p:nvGrpSpPr>
+            <p:cNvPr id="52" name="Group 51">
+              <a:extLst>
+                <a:ext uri="{FF2B5EF4-FFF2-40B4-BE49-F238E27FC236}">
+                  <a16:creationId xmlns:a16="http://schemas.microsoft.com/office/drawing/2014/main" id="{5B174E6A-5C48-6FD2-FF9D-B6A409F8D9BC}"/>
+                </a:ext>
+              </a:extLst>
+            </p:cNvPr>
+            <p:cNvGrpSpPr/>
+            <p:nvPr/>
+          </p:nvGrpSpPr>
+          <p:grpSpPr>
+            <a:xfrm>
+              <a:off x="3657600" y="1525774"/>
+              <a:ext cx="834887" cy="576000"/>
+              <a:chOff x="3657600" y="1525774"/>
+              <a:chExt cx="1080000" cy="576000"/>
+            </a:xfrm>
+          </p:grpSpPr>
+          <p:sp>
+            <p:nvSpPr>
+              <p:cNvPr id="54" name="Rectangle 53">
+                <a:extLst>
+                  <a:ext uri="{FF2B5EF4-FFF2-40B4-BE49-F238E27FC236}">
+                    <a16:creationId xmlns:a16="http://schemas.microsoft.com/office/drawing/2014/main" id="{E415B884-13D7-6CC0-C395-6C762F4ABEE4}"/>
+                  </a:ext>
+                </a:extLst>
+              </p:cNvPr>
+              <p:cNvSpPr/>
+              <p:nvPr/>
+            </p:nvSpPr>
+            <p:spPr>
+              <a:xfrm>
+                <a:off x="3657600" y="1669774"/>
+                <a:ext cx="360000" cy="144000"/>
+              </a:xfrm>
+              <a:prstGeom prst="rect">
+                <a:avLst/>
+              </a:prstGeom>
+              <a:noFill/>
+            </p:spPr>
+            <p:style>
+              <a:lnRef idx="2">
+                <a:schemeClr val="accent1">
+                  <a:shade val="15000"/>
+                </a:schemeClr>
+              </a:lnRef>
+              <a:fillRef idx="1">
+                <a:schemeClr val="accent1"/>
+              </a:fillRef>
+              <a:effectRef idx="0">
+                <a:schemeClr val="accent1"/>
+              </a:effectRef>
+              <a:fontRef idx="minor">
+                <a:schemeClr val="lt1"/>
+              </a:fontRef>
+            </p:style>
+            <p:txBody>
+              <a:bodyPr rtlCol="0" anchor="ctr"/>
+              <a:lstStyle/>
+              <a:p>
+                <a:pPr algn="ctr"/>
+                <a:endParaRPr lang="en-PH"/>
+              </a:p>
+            </p:txBody>
+          </p:sp>
+          <p:sp>
+            <p:nvSpPr>
+              <p:cNvPr id="55" name="Rectangle 54">
+                <a:extLst>
+                  <a:ext uri="{FF2B5EF4-FFF2-40B4-BE49-F238E27FC236}">
+                    <a16:creationId xmlns:a16="http://schemas.microsoft.com/office/drawing/2014/main" id="{DFAB4100-B794-DBF9-DC26-407BC8395A0D}"/>
+                  </a:ext>
+                </a:extLst>
+              </p:cNvPr>
+              <p:cNvSpPr/>
+              <p:nvPr/>
+            </p:nvSpPr>
+            <p:spPr>
+              <a:xfrm>
+                <a:off x="4017600" y="1669774"/>
+                <a:ext cx="360000" cy="144000"/>
+              </a:xfrm>
+              <a:prstGeom prst="rect">
+                <a:avLst/>
+              </a:prstGeom>
+              <a:noFill/>
+            </p:spPr>
+            <p:style>
+              <a:lnRef idx="2">
+                <a:schemeClr val="accent1">
+                  <a:shade val="15000"/>
+                </a:schemeClr>
+              </a:lnRef>
+              <a:fillRef idx="1">
+                <a:schemeClr val="accent1"/>
+              </a:fillRef>
+              <a:effectRef idx="0">
+                <a:schemeClr val="accent1"/>
+              </a:effectRef>
+              <a:fontRef idx="minor">
+                <a:schemeClr val="lt1"/>
+              </a:fontRef>
+            </p:style>
+            <p:txBody>
+              <a:bodyPr rtlCol="0" anchor="ctr"/>
+              <a:lstStyle/>
+              <a:p>
+                <a:pPr algn="ctr"/>
+                <a:endParaRPr lang="en-PH"/>
+              </a:p>
+            </p:txBody>
+          </p:sp>
+          <p:sp>
+            <p:nvSpPr>
+              <p:cNvPr id="56" name="Rectangle 55">
+                <a:extLst>
+                  <a:ext uri="{FF2B5EF4-FFF2-40B4-BE49-F238E27FC236}">
+                    <a16:creationId xmlns:a16="http://schemas.microsoft.com/office/drawing/2014/main" id="{61C4C9A4-D420-71D0-DD6D-039A8E593191}"/>
+                  </a:ext>
+                </a:extLst>
+              </p:cNvPr>
+              <p:cNvSpPr/>
+              <p:nvPr/>
+            </p:nvSpPr>
+            <p:spPr>
+              <a:xfrm>
+                <a:off x="4377600" y="1669774"/>
+                <a:ext cx="360000" cy="144000"/>
+              </a:xfrm>
+              <a:prstGeom prst="rect">
+                <a:avLst/>
+              </a:prstGeom>
+              <a:noFill/>
+            </p:spPr>
+            <p:style>
+              <a:lnRef idx="2">
+                <a:schemeClr val="accent1">
+                  <a:shade val="15000"/>
+                </a:schemeClr>
+              </a:lnRef>
+              <a:fillRef idx="1">
+                <a:schemeClr val="accent1"/>
+              </a:fillRef>
+              <a:effectRef idx="0">
+                <a:schemeClr val="accent1"/>
+              </a:effectRef>
+              <a:fontRef idx="minor">
+                <a:schemeClr val="lt1"/>
+              </a:fontRef>
+            </p:style>
+            <p:txBody>
+              <a:bodyPr rtlCol="0" anchor="ctr"/>
+              <a:lstStyle/>
+              <a:p>
+                <a:pPr algn="ctr"/>
+                <a:endParaRPr lang="en-PH"/>
+              </a:p>
+            </p:txBody>
+          </p:sp>
+          <p:sp>
+            <p:nvSpPr>
+              <p:cNvPr id="57" name="Rectangle 56">
+                <a:extLst>
+                  <a:ext uri="{FF2B5EF4-FFF2-40B4-BE49-F238E27FC236}">
+                    <a16:creationId xmlns:a16="http://schemas.microsoft.com/office/drawing/2014/main" id="{896B7A72-93E7-B86E-883B-36CDDE240320}"/>
+                  </a:ext>
+                </a:extLst>
+              </p:cNvPr>
+              <p:cNvSpPr/>
+              <p:nvPr/>
+            </p:nvSpPr>
+            <p:spPr>
+              <a:xfrm>
+                <a:off x="3657600" y="1813774"/>
+                <a:ext cx="360000" cy="144000"/>
+              </a:xfrm>
+              <a:prstGeom prst="rect">
+                <a:avLst/>
+              </a:prstGeom>
+              <a:noFill/>
+            </p:spPr>
+            <p:style>
+              <a:lnRef idx="2">
+                <a:schemeClr val="accent1">
+                  <a:shade val="15000"/>
+                </a:schemeClr>
+              </a:lnRef>
+              <a:fillRef idx="1">
+                <a:schemeClr val="accent1"/>
+              </a:fillRef>
+              <a:effectRef idx="0">
+                <a:schemeClr val="accent1"/>
+              </a:effectRef>
+              <a:fontRef idx="minor">
+                <a:schemeClr val="lt1"/>
+              </a:fontRef>
+            </p:style>
+            <p:txBody>
+              <a:bodyPr rtlCol="0" anchor="ctr"/>
+              <a:lstStyle/>
+              <a:p>
+                <a:pPr algn="ctr"/>
+                <a:endParaRPr lang="en-PH"/>
+              </a:p>
+            </p:txBody>
+          </p:sp>
+          <p:sp>
+            <p:nvSpPr>
+              <p:cNvPr id="58" name="Rectangle 57">
+                <a:extLst>
+                  <a:ext uri="{FF2B5EF4-FFF2-40B4-BE49-F238E27FC236}">
+                    <a16:creationId xmlns:a16="http://schemas.microsoft.com/office/drawing/2014/main" id="{EDCA511A-804B-9C85-9C86-AEDAEE068A7D}"/>
+                  </a:ext>
+                </a:extLst>
+              </p:cNvPr>
+              <p:cNvSpPr/>
+              <p:nvPr/>
+            </p:nvSpPr>
+            <p:spPr>
+              <a:xfrm>
+                <a:off x="4017600" y="1813774"/>
+                <a:ext cx="360000" cy="144000"/>
+              </a:xfrm>
+              <a:prstGeom prst="rect">
+                <a:avLst/>
+              </a:prstGeom>
+              <a:noFill/>
+            </p:spPr>
+            <p:style>
+              <a:lnRef idx="2">
+                <a:schemeClr val="accent1">
+                  <a:shade val="15000"/>
+                </a:schemeClr>
+              </a:lnRef>
+              <a:fillRef idx="1">
+                <a:schemeClr val="accent1"/>
+              </a:fillRef>
+              <a:effectRef idx="0">
+                <a:schemeClr val="accent1"/>
+              </a:effectRef>
+              <a:fontRef idx="minor">
+                <a:schemeClr val="lt1"/>
+              </a:fontRef>
+            </p:style>
+            <p:txBody>
+              <a:bodyPr rtlCol="0" anchor="ctr"/>
+              <a:lstStyle/>
+              <a:p>
+                <a:pPr algn="ctr"/>
+                <a:endParaRPr lang="en-PH"/>
+              </a:p>
+            </p:txBody>
+          </p:sp>
+          <p:sp>
+            <p:nvSpPr>
+              <p:cNvPr id="59" name="Rectangle 58">
+                <a:extLst>
+                  <a:ext uri="{FF2B5EF4-FFF2-40B4-BE49-F238E27FC236}">
+                    <a16:creationId xmlns:a16="http://schemas.microsoft.com/office/drawing/2014/main" id="{6050EBE2-1BB5-29F7-ECC8-4BF474E40C4E}"/>
+                  </a:ext>
+                </a:extLst>
+              </p:cNvPr>
+              <p:cNvSpPr/>
+              <p:nvPr/>
+            </p:nvSpPr>
+            <p:spPr>
+              <a:xfrm>
+                <a:off x="4377600" y="1813774"/>
+                <a:ext cx="360000" cy="144000"/>
+              </a:xfrm>
+              <a:prstGeom prst="rect">
+                <a:avLst/>
+              </a:prstGeom>
+              <a:noFill/>
+            </p:spPr>
+            <p:style>
+              <a:lnRef idx="2">
+                <a:schemeClr val="accent1">
+                  <a:shade val="15000"/>
+                </a:schemeClr>
+              </a:lnRef>
+              <a:fillRef idx="1">
+                <a:schemeClr val="accent1"/>
+              </a:fillRef>
+              <a:effectRef idx="0">
+                <a:schemeClr val="accent1"/>
+              </a:effectRef>
+              <a:fontRef idx="minor">
+                <a:schemeClr val="lt1"/>
+              </a:fontRef>
+            </p:style>
+            <p:txBody>
+              <a:bodyPr rtlCol="0" anchor="ctr"/>
+              <a:lstStyle/>
+              <a:p>
+                <a:pPr algn="ctr"/>
+                <a:endParaRPr lang="en-PH"/>
+              </a:p>
+            </p:txBody>
+          </p:sp>
+          <p:sp>
+            <p:nvSpPr>
+              <p:cNvPr id="60" name="Rectangle 59">
+                <a:extLst>
+                  <a:ext uri="{FF2B5EF4-FFF2-40B4-BE49-F238E27FC236}">
+                    <a16:creationId xmlns:a16="http://schemas.microsoft.com/office/drawing/2014/main" id="{E2058BD3-9578-7D33-06D4-07D230BC98F2}"/>
+                  </a:ext>
+                </a:extLst>
+              </p:cNvPr>
+              <p:cNvSpPr/>
+              <p:nvPr/>
+            </p:nvSpPr>
+            <p:spPr>
+              <a:xfrm>
+                <a:off x="3657600" y="1957774"/>
+                <a:ext cx="360000" cy="144000"/>
+              </a:xfrm>
+              <a:prstGeom prst="rect">
+                <a:avLst/>
+              </a:prstGeom>
+              <a:noFill/>
+            </p:spPr>
+            <p:style>
+              <a:lnRef idx="2">
+                <a:schemeClr val="accent1">
+                  <a:shade val="15000"/>
+                </a:schemeClr>
+              </a:lnRef>
+              <a:fillRef idx="1">
+                <a:schemeClr val="accent1"/>
+              </a:fillRef>
+              <a:effectRef idx="0">
+                <a:schemeClr val="accent1"/>
+              </a:effectRef>
+              <a:fontRef idx="minor">
+                <a:schemeClr val="lt1"/>
+              </a:fontRef>
+            </p:style>
+            <p:txBody>
+              <a:bodyPr rtlCol="0" anchor="ctr"/>
+              <a:lstStyle/>
+              <a:p>
+                <a:pPr algn="ctr"/>
+                <a:endParaRPr lang="en-PH"/>
+              </a:p>
+            </p:txBody>
+          </p:sp>
+          <p:sp>
+            <p:nvSpPr>
+              <p:cNvPr id="61" name="Rectangle 60">
+                <a:extLst>
+                  <a:ext uri="{FF2B5EF4-FFF2-40B4-BE49-F238E27FC236}">
+                    <a16:creationId xmlns:a16="http://schemas.microsoft.com/office/drawing/2014/main" id="{CBE1166E-C219-516E-8B43-E77E1E73AA0C}"/>
+                  </a:ext>
+                </a:extLst>
+              </p:cNvPr>
+              <p:cNvSpPr/>
+              <p:nvPr/>
+            </p:nvSpPr>
+            <p:spPr>
+              <a:xfrm>
+                <a:off x="4017600" y="1957774"/>
+                <a:ext cx="360000" cy="144000"/>
+              </a:xfrm>
+              <a:prstGeom prst="rect">
+                <a:avLst/>
+              </a:prstGeom>
+              <a:noFill/>
+            </p:spPr>
+            <p:style>
+              <a:lnRef idx="2">
+                <a:schemeClr val="accent1">
+                  <a:shade val="15000"/>
+                </a:schemeClr>
+              </a:lnRef>
+              <a:fillRef idx="1">
+                <a:schemeClr val="accent1"/>
+              </a:fillRef>
+              <a:effectRef idx="0">
+                <a:schemeClr val="accent1"/>
+              </a:effectRef>
+              <a:fontRef idx="minor">
+                <a:schemeClr val="lt1"/>
+              </a:fontRef>
+            </p:style>
+            <p:txBody>
+              <a:bodyPr rtlCol="0" anchor="ctr"/>
+              <a:lstStyle/>
+              <a:p>
+                <a:pPr algn="ctr"/>
+                <a:endParaRPr lang="en-PH"/>
+              </a:p>
+            </p:txBody>
+          </p:sp>
+          <p:sp>
+            <p:nvSpPr>
+              <p:cNvPr id="62" name="Rectangle 61">
+                <a:extLst>
+                  <a:ext uri="{FF2B5EF4-FFF2-40B4-BE49-F238E27FC236}">
+                    <a16:creationId xmlns:a16="http://schemas.microsoft.com/office/drawing/2014/main" id="{80C6EC94-6F43-F348-5C82-A51EC3564BC3}"/>
+                  </a:ext>
+                </a:extLst>
+              </p:cNvPr>
+              <p:cNvSpPr/>
+              <p:nvPr/>
+            </p:nvSpPr>
+            <p:spPr>
+              <a:xfrm>
+                <a:off x="4377600" y="1957774"/>
+                <a:ext cx="360000" cy="144000"/>
+              </a:xfrm>
+              <a:prstGeom prst="rect">
+                <a:avLst/>
+              </a:prstGeom>
+              <a:noFill/>
+            </p:spPr>
+            <p:style>
+              <a:lnRef idx="2">
+                <a:schemeClr val="accent1">
+                  <a:shade val="15000"/>
+                </a:schemeClr>
+              </a:lnRef>
+              <a:fillRef idx="1">
+                <a:schemeClr val="accent1"/>
+              </a:fillRef>
+              <a:effectRef idx="0">
+                <a:schemeClr val="accent1"/>
+              </a:effectRef>
+              <a:fontRef idx="minor">
+                <a:schemeClr val="lt1"/>
+              </a:fontRef>
+            </p:style>
+            <p:txBody>
+              <a:bodyPr rtlCol="0" anchor="ctr"/>
+              <a:lstStyle/>
+              <a:p>
+                <a:pPr algn="ctr"/>
+                <a:endParaRPr lang="en-PH"/>
+              </a:p>
+            </p:txBody>
+          </p:sp>
+          <p:sp>
+            <p:nvSpPr>
+              <p:cNvPr id="63" name="Rectangle 62">
+                <a:extLst>
+                  <a:ext uri="{FF2B5EF4-FFF2-40B4-BE49-F238E27FC236}">
+                    <a16:creationId xmlns:a16="http://schemas.microsoft.com/office/drawing/2014/main" id="{2F95E60F-A202-9B23-49E1-6403962ADCF5}"/>
+                  </a:ext>
+                </a:extLst>
+              </p:cNvPr>
+              <p:cNvSpPr/>
+              <p:nvPr/>
+            </p:nvSpPr>
+            <p:spPr>
+              <a:xfrm>
+                <a:off x="3657600" y="1525774"/>
+                <a:ext cx="1080000" cy="144000"/>
+              </a:xfrm>
+              <a:prstGeom prst="rect">
+                <a:avLst/>
+              </a:prstGeom>
+              <a:solidFill>
+                <a:schemeClr val="accent1"/>
+              </a:solidFill>
+            </p:spPr>
+            <p:style>
+              <a:lnRef idx="2">
+                <a:schemeClr val="accent1">
+                  <a:shade val="15000"/>
+                </a:schemeClr>
+              </a:lnRef>
+              <a:fillRef idx="1">
+                <a:schemeClr val="accent1"/>
+              </a:fillRef>
+              <a:effectRef idx="0">
+                <a:schemeClr val="accent1"/>
+              </a:effectRef>
+              <a:fontRef idx="minor">
+                <a:schemeClr val="lt1"/>
+              </a:fontRef>
+            </p:style>
+            <p:txBody>
+              <a:bodyPr rtlCol="0" anchor="ctr"/>
+              <a:lstStyle/>
+              <a:p>
+                <a:pPr algn="ctr"/>
+                <a:endParaRPr lang="en-PH"/>
+              </a:p>
+            </p:txBody>
+          </p:sp>
+        </p:grpSp>
+        <p:sp>
+          <p:nvSpPr>
+            <p:cNvPr id="53" name="TextBox 52">
+              <a:extLst>
+                <a:ext uri="{FF2B5EF4-FFF2-40B4-BE49-F238E27FC236}">
+                  <a16:creationId xmlns:a16="http://schemas.microsoft.com/office/drawing/2014/main" id="{6A413324-EC08-8234-7C0F-B78E07EE80B7}"/>
+                </a:ext>
+              </a:extLst>
+            </p:cNvPr>
+            <p:cNvSpPr txBox="1"/>
+            <p:nvPr/>
+          </p:nvSpPr>
+          <p:spPr>
+            <a:xfrm>
+              <a:off x="3352505" y="2101774"/>
+              <a:ext cx="1445073" cy="307777"/>
+            </a:xfrm>
+            <a:prstGeom prst="rect">
+              <a:avLst/>
+            </a:prstGeom>
+            <a:noFill/>
+          </p:spPr>
+          <p:txBody>
+            <a:bodyPr wrap="square" rtlCol="0">
+              <a:spAutoFit/>
+            </a:bodyPr>
+            <a:lstStyle/>
+            <a:p>
+              <a:pPr algn="ctr"/>
+              <a:r>
+                <a:rPr lang="en-PH" sz="1400" dirty="0"/>
+                <a:t>Historical Train</a:t>
+              </a:r>
+            </a:p>
+          </p:txBody>
+        </p:sp>
+      </p:grpSp>
+      <p:grpSp>
+        <p:nvGrpSpPr>
+          <p:cNvPr id="65" name="Group 64">
+            <a:extLst>
+              <a:ext uri="{FF2B5EF4-FFF2-40B4-BE49-F238E27FC236}">
+                <a16:creationId xmlns:a16="http://schemas.microsoft.com/office/drawing/2014/main" id="{5F563B29-11E5-8CDA-87C2-48E21BA6714E}"/>
+              </a:ext>
+            </a:extLst>
+          </p:cNvPr>
+          <p:cNvGrpSpPr/>
+          <p:nvPr/>
+        </p:nvGrpSpPr>
+        <p:grpSpPr>
+          <a:xfrm>
+            <a:off x="4998260" y="2841551"/>
+            <a:ext cx="1854074" cy="883777"/>
+            <a:chOff x="3145606" y="1525774"/>
+            <a:chExt cx="1854074" cy="883777"/>
+          </a:xfrm>
+        </p:grpSpPr>
+        <p:grpSp>
+          <p:nvGrpSpPr>
+            <p:cNvPr id="67" name="Group 66">
+              <a:extLst>
+                <a:ext uri="{FF2B5EF4-FFF2-40B4-BE49-F238E27FC236}">
+                  <a16:creationId xmlns:a16="http://schemas.microsoft.com/office/drawing/2014/main" id="{44368825-98ED-B283-CF3A-211562222E5A}"/>
+                </a:ext>
+              </a:extLst>
+            </p:cNvPr>
+            <p:cNvGrpSpPr/>
+            <p:nvPr/>
+          </p:nvGrpSpPr>
+          <p:grpSpPr>
+            <a:xfrm>
+              <a:off x="3657600" y="1525774"/>
+              <a:ext cx="834887" cy="576000"/>
+              <a:chOff x="3657600" y="1525774"/>
+              <a:chExt cx="1080000" cy="576000"/>
+            </a:xfrm>
+          </p:grpSpPr>
+          <p:sp>
+            <p:nvSpPr>
+              <p:cNvPr id="69" name="Rectangle 68">
+                <a:extLst>
+                  <a:ext uri="{FF2B5EF4-FFF2-40B4-BE49-F238E27FC236}">
+                    <a16:creationId xmlns:a16="http://schemas.microsoft.com/office/drawing/2014/main" id="{BD76EC08-6401-95A7-C927-10E66A6B7C60}"/>
+                  </a:ext>
+                </a:extLst>
+              </p:cNvPr>
+              <p:cNvSpPr/>
+              <p:nvPr/>
+            </p:nvSpPr>
+            <p:spPr>
+              <a:xfrm>
+                <a:off x="3657600" y="1669774"/>
+                <a:ext cx="360000" cy="144000"/>
+              </a:xfrm>
+              <a:prstGeom prst="rect">
+                <a:avLst/>
+              </a:prstGeom>
+              <a:noFill/>
+            </p:spPr>
+            <p:style>
+              <a:lnRef idx="2">
+                <a:schemeClr val="accent1">
+                  <a:shade val="15000"/>
+                </a:schemeClr>
+              </a:lnRef>
+              <a:fillRef idx="1">
+                <a:schemeClr val="accent1"/>
+              </a:fillRef>
+              <a:effectRef idx="0">
+                <a:schemeClr val="accent1"/>
+              </a:effectRef>
+              <a:fontRef idx="minor">
+                <a:schemeClr val="lt1"/>
+              </a:fontRef>
+            </p:style>
+            <p:txBody>
+              <a:bodyPr rtlCol="0" anchor="ctr"/>
+              <a:lstStyle/>
+              <a:p>
+                <a:pPr algn="ctr"/>
+                <a:endParaRPr lang="en-PH"/>
+              </a:p>
+            </p:txBody>
+          </p:sp>
+          <p:sp>
+            <p:nvSpPr>
+              <p:cNvPr id="70" name="Rectangle 69">
+                <a:extLst>
+                  <a:ext uri="{FF2B5EF4-FFF2-40B4-BE49-F238E27FC236}">
+                    <a16:creationId xmlns:a16="http://schemas.microsoft.com/office/drawing/2014/main" id="{2C499918-B16E-99B2-4E5C-2BE7EA5EA68A}"/>
+                  </a:ext>
+                </a:extLst>
+              </p:cNvPr>
+              <p:cNvSpPr/>
+              <p:nvPr/>
+            </p:nvSpPr>
+            <p:spPr>
+              <a:xfrm>
+                <a:off x="4017600" y="1669774"/>
+                <a:ext cx="360000" cy="144000"/>
+              </a:xfrm>
+              <a:prstGeom prst="rect">
+                <a:avLst/>
+              </a:prstGeom>
+              <a:noFill/>
+            </p:spPr>
+            <p:style>
+              <a:lnRef idx="2">
+                <a:schemeClr val="accent1">
+                  <a:shade val="15000"/>
+                </a:schemeClr>
+              </a:lnRef>
+              <a:fillRef idx="1">
+                <a:schemeClr val="accent1"/>
+              </a:fillRef>
+              <a:effectRef idx="0">
+                <a:schemeClr val="accent1"/>
+              </a:effectRef>
+              <a:fontRef idx="minor">
+                <a:schemeClr val="lt1"/>
+              </a:fontRef>
+            </p:style>
+            <p:txBody>
+              <a:bodyPr rtlCol="0" anchor="ctr"/>
+              <a:lstStyle/>
+              <a:p>
+                <a:pPr algn="ctr"/>
+                <a:endParaRPr lang="en-PH"/>
+              </a:p>
+            </p:txBody>
+          </p:sp>
+          <p:sp>
+            <p:nvSpPr>
+              <p:cNvPr id="71" name="Rectangle 70">
+                <a:extLst>
+                  <a:ext uri="{FF2B5EF4-FFF2-40B4-BE49-F238E27FC236}">
+                    <a16:creationId xmlns:a16="http://schemas.microsoft.com/office/drawing/2014/main" id="{F4CDD41B-4716-5D48-3439-F2318D015D12}"/>
+                  </a:ext>
+                </a:extLst>
+              </p:cNvPr>
+              <p:cNvSpPr/>
+              <p:nvPr/>
+            </p:nvSpPr>
+            <p:spPr>
+              <a:xfrm>
+                <a:off x="4377600" y="1669774"/>
+                <a:ext cx="360000" cy="144000"/>
+              </a:xfrm>
+              <a:prstGeom prst="rect">
+                <a:avLst/>
+              </a:prstGeom>
+              <a:noFill/>
+            </p:spPr>
+            <p:style>
+              <a:lnRef idx="2">
+                <a:schemeClr val="accent1">
+                  <a:shade val="15000"/>
+                </a:schemeClr>
+              </a:lnRef>
+              <a:fillRef idx="1">
+                <a:schemeClr val="accent1"/>
+              </a:fillRef>
+              <a:effectRef idx="0">
+                <a:schemeClr val="accent1"/>
+              </a:effectRef>
+              <a:fontRef idx="minor">
+                <a:schemeClr val="lt1"/>
+              </a:fontRef>
+            </p:style>
+            <p:txBody>
+              <a:bodyPr rtlCol="0" anchor="ctr"/>
+              <a:lstStyle/>
+              <a:p>
+                <a:pPr algn="ctr"/>
+                <a:endParaRPr lang="en-PH"/>
+              </a:p>
+            </p:txBody>
+          </p:sp>
+          <p:sp>
+            <p:nvSpPr>
+              <p:cNvPr id="72" name="Rectangle 71">
+                <a:extLst>
+                  <a:ext uri="{FF2B5EF4-FFF2-40B4-BE49-F238E27FC236}">
+                    <a16:creationId xmlns:a16="http://schemas.microsoft.com/office/drawing/2014/main" id="{D7C751D6-2A0E-1D3D-E704-09E56FE933AB}"/>
+                  </a:ext>
+                </a:extLst>
+              </p:cNvPr>
+              <p:cNvSpPr/>
+              <p:nvPr/>
+            </p:nvSpPr>
+            <p:spPr>
+              <a:xfrm>
+                <a:off x="3657600" y="1813774"/>
+                <a:ext cx="360000" cy="144000"/>
+              </a:xfrm>
+              <a:prstGeom prst="rect">
+                <a:avLst/>
+              </a:prstGeom>
+              <a:noFill/>
+            </p:spPr>
+            <p:style>
+              <a:lnRef idx="2">
+                <a:schemeClr val="accent1">
+                  <a:shade val="15000"/>
+                </a:schemeClr>
+              </a:lnRef>
+              <a:fillRef idx="1">
+                <a:schemeClr val="accent1"/>
+              </a:fillRef>
+              <a:effectRef idx="0">
+                <a:schemeClr val="accent1"/>
+              </a:effectRef>
+              <a:fontRef idx="minor">
+                <a:schemeClr val="lt1"/>
+              </a:fontRef>
+            </p:style>
+            <p:txBody>
+              <a:bodyPr rtlCol="0" anchor="ctr"/>
+              <a:lstStyle/>
+              <a:p>
+                <a:pPr algn="ctr"/>
+                <a:endParaRPr lang="en-PH"/>
+              </a:p>
+            </p:txBody>
+          </p:sp>
+          <p:sp>
+            <p:nvSpPr>
+              <p:cNvPr id="73" name="Rectangle 72">
+                <a:extLst>
+                  <a:ext uri="{FF2B5EF4-FFF2-40B4-BE49-F238E27FC236}">
+                    <a16:creationId xmlns:a16="http://schemas.microsoft.com/office/drawing/2014/main" id="{E20B862D-7AD4-060D-8C98-360EBA664EF6}"/>
+                  </a:ext>
+                </a:extLst>
+              </p:cNvPr>
+              <p:cNvSpPr/>
+              <p:nvPr/>
+            </p:nvSpPr>
+            <p:spPr>
+              <a:xfrm>
+                <a:off x="4017600" y="1813774"/>
+                <a:ext cx="360000" cy="144000"/>
+              </a:xfrm>
+              <a:prstGeom prst="rect">
+                <a:avLst/>
+              </a:prstGeom>
+              <a:noFill/>
+            </p:spPr>
+            <p:style>
+              <a:lnRef idx="2">
+                <a:schemeClr val="accent1">
+                  <a:shade val="15000"/>
+                </a:schemeClr>
+              </a:lnRef>
+              <a:fillRef idx="1">
+                <a:schemeClr val="accent1"/>
+              </a:fillRef>
+              <a:effectRef idx="0">
+                <a:schemeClr val="accent1"/>
+              </a:effectRef>
+              <a:fontRef idx="minor">
+                <a:schemeClr val="lt1"/>
+              </a:fontRef>
+            </p:style>
+            <p:txBody>
+              <a:bodyPr rtlCol="0" anchor="ctr"/>
+              <a:lstStyle/>
+              <a:p>
+                <a:pPr algn="ctr"/>
+                <a:endParaRPr lang="en-PH"/>
+              </a:p>
+            </p:txBody>
+          </p:sp>
+          <p:sp>
+            <p:nvSpPr>
+              <p:cNvPr id="74" name="Rectangle 73">
+                <a:extLst>
+                  <a:ext uri="{FF2B5EF4-FFF2-40B4-BE49-F238E27FC236}">
+                    <a16:creationId xmlns:a16="http://schemas.microsoft.com/office/drawing/2014/main" id="{419E8E4E-68F8-D004-9F60-D12332BACCB4}"/>
+                  </a:ext>
+                </a:extLst>
+              </p:cNvPr>
+              <p:cNvSpPr/>
+              <p:nvPr/>
+            </p:nvSpPr>
+            <p:spPr>
+              <a:xfrm>
+                <a:off x="4377600" y="1813774"/>
+                <a:ext cx="360000" cy="144000"/>
+              </a:xfrm>
+              <a:prstGeom prst="rect">
+                <a:avLst/>
+              </a:prstGeom>
+              <a:noFill/>
+            </p:spPr>
+            <p:style>
+              <a:lnRef idx="2">
+                <a:schemeClr val="accent1">
+                  <a:shade val="15000"/>
+                </a:schemeClr>
+              </a:lnRef>
+              <a:fillRef idx="1">
+                <a:schemeClr val="accent1"/>
+              </a:fillRef>
+              <a:effectRef idx="0">
+                <a:schemeClr val="accent1"/>
+              </a:effectRef>
+              <a:fontRef idx="minor">
+                <a:schemeClr val="lt1"/>
+              </a:fontRef>
+            </p:style>
+            <p:txBody>
+              <a:bodyPr rtlCol="0" anchor="ctr"/>
+              <a:lstStyle/>
+              <a:p>
+                <a:pPr algn="ctr"/>
+                <a:endParaRPr lang="en-PH"/>
+              </a:p>
+            </p:txBody>
+          </p:sp>
+          <p:sp>
+            <p:nvSpPr>
+              <p:cNvPr id="75" name="Rectangle 74">
+                <a:extLst>
+                  <a:ext uri="{FF2B5EF4-FFF2-40B4-BE49-F238E27FC236}">
+                    <a16:creationId xmlns:a16="http://schemas.microsoft.com/office/drawing/2014/main" id="{69DE3C3A-0D86-D4C9-46DB-8CC4AEBC7818}"/>
+                  </a:ext>
+                </a:extLst>
+              </p:cNvPr>
+              <p:cNvSpPr/>
+              <p:nvPr/>
+            </p:nvSpPr>
+            <p:spPr>
+              <a:xfrm>
+                <a:off x="3657600" y="1957774"/>
+                <a:ext cx="360000" cy="144000"/>
+              </a:xfrm>
+              <a:prstGeom prst="rect">
+                <a:avLst/>
+              </a:prstGeom>
+              <a:noFill/>
+            </p:spPr>
+            <p:style>
+              <a:lnRef idx="2">
+                <a:schemeClr val="accent1">
+                  <a:shade val="15000"/>
+                </a:schemeClr>
+              </a:lnRef>
+              <a:fillRef idx="1">
+                <a:schemeClr val="accent1"/>
+              </a:fillRef>
+              <a:effectRef idx="0">
+                <a:schemeClr val="accent1"/>
+              </a:effectRef>
+              <a:fontRef idx="minor">
+                <a:schemeClr val="lt1"/>
+              </a:fontRef>
+            </p:style>
+            <p:txBody>
+              <a:bodyPr rtlCol="0" anchor="ctr"/>
+              <a:lstStyle/>
+              <a:p>
+                <a:pPr algn="ctr"/>
+                <a:endParaRPr lang="en-PH"/>
+              </a:p>
+            </p:txBody>
+          </p:sp>
+          <p:sp>
+            <p:nvSpPr>
+              <p:cNvPr id="76" name="Rectangle 75">
+                <a:extLst>
+                  <a:ext uri="{FF2B5EF4-FFF2-40B4-BE49-F238E27FC236}">
+                    <a16:creationId xmlns:a16="http://schemas.microsoft.com/office/drawing/2014/main" id="{3A677AB0-151A-1E4C-3BF3-8E7DCC915C81}"/>
+                  </a:ext>
+                </a:extLst>
+              </p:cNvPr>
+              <p:cNvSpPr/>
+              <p:nvPr/>
+            </p:nvSpPr>
+            <p:spPr>
+              <a:xfrm>
+                <a:off x="4017600" y="1957774"/>
+                <a:ext cx="360000" cy="144000"/>
+              </a:xfrm>
+              <a:prstGeom prst="rect">
+                <a:avLst/>
+              </a:prstGeom>
+              <a:noFill/>
+            </p:spPr>
+            <p:style>
+              <a:lnRef idx="2">
+                <a:schemeClr val="accent1">
+                  <a:shade val="15000"/>
+                </a:schemeClr>
+              </a:lnRef>
+              <a:fillRef idx="1">
+                <a:schemeClr val="accent1"/>
+              </a:fillRef>
+              <a:effectRef idx="0">
+                <a:schemeClr val="accent1"/>
+              </a:effectRef>
+              <a:fontRef idx="minor">
+                <a:schemeClr val="lt1"/>
+              </a:fontRef>
+            </p:style>
+            <p:txBody>
+              <a:bodyPr rtlCol="0" anchor="ctr"/>
+              <a:lstStyle/>
+              <a:p>
+                <a:pPr algn="ctr"/>
+                <a:endParaRPr lang="en-PH"/>
+              </a:p>
+            </p:txBody>
+          </p:sp>
+          <p:sp>
+            <p:nvSpPr>
+              <p:cNvPr id="77" name="Rectangle 76">
+                <a:extLst>
+                  <a:ext uri="{FF2B5EF4-FFF2-40B4-BE49-F238E27FC236}">
+                    <a16:creationId xmlns:a16="http://schemas.microsoft.com/office/drawing/2014/main" id="{30A870AC-2C3F-13CE-373C-7A498FD275B2}"/>
+                  </a:ext>
+                </a:extLst>
+              </p:cNvPr>
+              <p:cNvSpPr/>
+              <p:nvPr/>
+            </p:nvSpPr>
+            <p:spPr>
+              <a:xfrm>
+                <a:off x="4377600" y="1957774"/>
+                <a:ext cx="360000" cy="144000"/>
+              </a:xfrm>
+              <a:prstGeom prst="rect">
+                <a:avLst/>
+              </a:prstGeom>
+              <a:noFill/>
+            </p:spPr>
+            <p:style>
+              <a:lnRef idx="2">
+                <a:schemeClr val="accent1">
+                  <a:shade val="15000"/>
+                </a:schemeClr>
+              </a:lnRef>
+              <a:fillRef idx="1">
+                <a:schemeClr val="accent1"/>
+              </a:fillRef>
+              <a:effectRef idx="0">
+                <a:schemeClr val="accent1"/>
+              </a:effectRef>
+              <a:fontRef idx="minor">
+                <a:schemeClr val="lt1"/>
+              </a:fontRef>
+            </p:style>
+            <p:txBody>
+              <a:bodyPr rtlCol="0" anchor="ctr"/>
+              <a:lstStyle/>
+              <a:p>
+                <a:pPr algn="ctr"/>
+                <a:endParaRPr lang="en-PH"/>
+              </a:p>
+            </p:txBody>
+          </p:sp>
+          <p:sp>
+            <p:nvSpPr>
+              <p:cNvPr id="78" name="Rectangle 77">
+                <a:extLst>
+                  <a:ext uri="{FF2B5EF4-FFF2-40B4-BE49-F238E27FC236}">
+                    <a16:creationId xmlns:a16="http://schemas.microsoft.com/office/drawing/2014/main" id="{86789209-3F16-C007-62CC-4743947166D6}"/>
+                  </a:ext>
+                </a:extLst>
+              </p:cNvPr>
+              <p:cNvSpPr/>
+              <p:nvPr/>
+            </p:nvSpPr>
+            <p:spPr>
+              <a:xfrm>
+                <a:off x="3657600" y="1525774"/>
+                <a:ext cx="1080000" cy="144000"/>
+              </a:xfrm>
+              <a:prstGeom prst="rect">
+                <a:avLst/>
+              </a:prstGeom>
+              <a:solidFill>
+                <a:schemeClr val="accent1"/>
+              </a:solidFill>
+            </p:spPr>
+            <p:style>
+              <a:lnRef idx="2">
+                <a:schemeClr val="accent1">
+                  <a:shade val="15000"/>
+                </a:schemeClr>
+              </a:lnRef>
+              <a:fillRef idx="1">
+                <a:schemeClr val="accent1"/>
+              </a:fillRef>
+              <a:effectRef idx="0">
+                <a:schemeClr val="accent1"/>
+              </a:effectRef>
+              <a:fontRef idx="minor">
+                <a:schemeClr val="lt1"/>
+              </a:fontRef>
+            </p:style>
+            <p:txBody>
+              <a:bodyPr rtlCol="0" anchor="ctr"/>
+              <a:lstStyle/>
+              <a:p>
+                <a:pPr algn="ctr"/>
+                <a:endParaRPr lang="en-PH"/>
+              </a:p>
+            </p:txBody>
+          </p:sp>
+        </p:grpSp>
+        <p:sp>
+          <p:nvSpPr>
+            <p:cNvPr id="68" name="TextBox 67">
+              <a:extLst>
+                <a:ext uri="{FF2B5EF4-FFF2-40B4-BE49-F238E27FC236}">
+                  <a16:creationId xmlns:a16="http://schemas.microsoft.com/office/drawing/2014/main" id="{DD4E46BA-B782-F22A-8A65-F51E9A224007}"/>
+                </a:ext>
+              </a:extLst>
+            </p:cNvPr>
+            <p:cNvSpPr txBox="1"/>
+            <p:nvPr/>
+          </p:nvSpPr>
+          <p:spPr>
+            <a:xfrm>
+              <a:off x="3145606" y="2101774"/>
+              <a:ext cx="1854074" cy="307777"/>
+            </a:xfrm>
+            <a:prstGeom prst="rect">
+              <a:avLst/>
+            </a:prstGeom>
+            <a:noFill/>
+          </p:spPr>
+          <p:txBody>
+            <a:bodyPr wrap="square" rtlCol="0">
+              <a:spAutoFit/>
+            </a:bodyPr>
+            <a:lstStyle/>
+            <a:p>
+              <a:pPr algn="ctr"/>
+              <a:r>
+                <a:rPr lang="en-PH" sz="1400" dirty="0"/>
+                <a:t>Historical Scoring</a:t>
+              </a:r>
+            </a:p>
+          </p:txBody>
+        </p:sp>
+      </p:grpSp>
+      <p:grpSp>
+        <p:nvGrpSpPr>
+          <p:cNvPr id="80" name="Group 79">
+            <a:extLst>
+              <a:ext uri="{FF2B5EF4-FFF2-40B4-BE49-F238E27FC236}">
+                <a16:creationId xmlns:a16="http://schemas.microsoft.com/office/drawing/2014/main" id="{C10D6E79-7CE4-F4C5-C2E4-F40059DF4D0C}"/>
+              </a:ext>
+            </a:extLst>
+          </p:cNvPr>
+          <p:cNvGrpSpPr/>
+          <p:nvPr/>
+        </p:nvGrpSpPr>
+        <p:grpSpPr>
+          <a:xfrm>
+            <a:off x="8517598" y="2843888"/>
+            <a:ext cx="1789507" cy="883777"/>
+            <a:chOff x="3180288" y="1525774"/>
+            <a:chExt cx="1789507" cy="883777"/>
+          </a:xfrm>
+        </p:grpSpPr>
+        <p:grpSp>
+          <p:nvGrpSpPr>
+            <p:cNvPr id="82" name="Group 81">
+              <a:extLst>
+                <a:ext uri="{FF2B5EF4-FFF2-40B4-BE49-F238E27FC236}">
+                  <a16:creationId xmlns:a16="http://schemas.microsoft.com/office/drawing/2014/main" id="{25AA9F11-53BC-B8F6-CAE2-7DE6008E6D78}"/>
+                </a:ext>
+              </a:extLst>
+            </p:cNvPr>
+            <p:cNvGrpSpPr/>
+            <p:nvPr/>
+          </p:nvGrpSpPr>
+          <p:grpSpPr>
+            <a:xfrm>
+              <a:off x="3657600" y="1525774"/>
+              <a:ext cx="834887" cy="576000"/>
+              <a:chOff x="3657600" y="1525774"/>
+              <a:chExt cx="1080000" cy="576000"/>
+            </a:xfrm>
+          </p:grpSpPr>
+          <p:sp>
+            <p:nvSpPr>
+              <p:cNvPr id="84" name="Rectangle 83">
+                <a:extLst>
+                  <a:ext uri="{FF2B5EF4-FFF2-40B4-BE49-F238E27FC236}">
+                    <a16:creationId xmlns:a16="http://schemas.microsoft.com/office/drawing/2014/main" id="{840CA6F1-6211-A771-DA48-BE48EA341AD0}"/>
+                  </a:ext>
+                </a:extLst>
+              </p:cNvPr>
+              <p:cNvSpPr/>
+              <p:nvPr/>
+            </p:nvSpPr>
+            <p:spPr>
+              <a:xfrm>
+                <a:off x="3657600" y="1669774"/>
+                <a:ext cx="360000" cy="144000"/>
+              </a:xfrm>
+              <a:prstGeom prst="rect">
+                <a:avLst/>
+              </a:prstGeom>
+              <a:noFill/>
+            </p:spPr>
+            <p:style>
+              <a:lnRef idx="2">
+                <a:schemeClr val="accent1">
+                  <a:shade val="15000"/>
+                </a:schemeClr>
+              </a:lnRef>
+              <a:fillRef idx="1">
+                <a:schemeClr val="accent1"/>
+              </a:fillRef>
+              <a:effectRef idx="0">
+                <a:schemeClr val="accent1"/>
+              </a:effectRef>
+              <a:fontRef idx="minor">
+                <a:schemeClr val="lt1"/>
+              </a:fontRef>
+            </p:style>
+            <p:txBody>
+              <a:bodyPr rtlCol="0" anchor="ctr"/>
+              <a:lstStyle/>
+              <a:p>
+                <a:pPr algn="ctr"/>
+                <a:endParaRPr lang="en-PH"/>
+              </a:p>
+            </p:txBody>
+          </p:sp>
+          <p:sp>
+            <p:nvSpPr>
+              <p:cNvPr id="85" name="Rectangle 84">
+                <a:extLst>
+                  <a:ext uri="{FF2B5EF4-FFF2-40B4-BE49-F238E27FC236}">
+                    <a16:creationId xmlns:a16="http://schemas.microsoft.com/office/drawing/2014/main" id="{6BAFD8F8-FAF2-20CE-6520-A267040A4272}"/>
+                  </a:ext>
+                </a:extLst>
+              </p:cNvPr>
+              <p:cNvSpPr/>
+              <p:nvPr/>
+            </p:nvSpPr>
+            <p:spPr>
+              <a:xfrm>
+                <a:off x="4017600" y="1669774"/>
+                <a:ext cx="360000" cy="144000"/>
+              </a:xfrm>
+              <a:prstGeom prst="rect">
+                <a:avLst/>
+              </a:prstGeom>
+              <a:noFill/>
+            </p:spPr>
+            <p:style>
+              <a:lnRef idx="2">
+                <a:schemeClr val="accent1">
+                  <a:shade val="15000"/>
+                </a:schemeClr>
+              </a:lnRef>
+              <a:fillRef idx="1">
+                <a:schemeClr val="accent1"/>
+              </a:fillRef>
+              <a:effectRef idx="0">
+                <a:schemeClr val="accent1"/>
+              </a:effectRef>
+              <a:fontRef idx="minor">
+                <a:schemeClr val="lt1"/>
+              </a:fontRef>
+            </p:style>
+            <p:txBody>
+              <a:bodyPr rtlCol="0" anchor="ctr"/>
+              <a:lstStyle/>
+              <a:p>
+                <a:pPr algn="ctr"/>
+                <a:endParaRPr lang="en-PH"/>
+              </a:p>
+            </p:txBody>
+          </p:sp>
+          <p:sp>
+            <p:nvSpPr>
+              <p:cNvPr id="86" name="Rectangle 85">
+                <a:extLst>
+                  <a:ext uri="{FF2B5EF4-FFF2-40B4-BE49-F238E27FC236}">
+                    <a16:creationId xmlns:a16="http://schemas.microsoft.com/office/drawing/2014/main" id="{87923981-398D-B9E0-42F7-B8A0FF9905D9}"/>
+                  </a:ext>
+                </a:extLst>
+              </p:cNvPr>
+              <p:cNvSpPr/>
+              <p:nvPr/>
+            </p:nvSpPr>
+            <p:spPr>
+              <a:xfrm>
+                <a:off x="4377600" y="1669774"/>
+                <a:ext cx="360000" cy="144000"/>
+              </a:xfrm>
+              <a:prstGeom prst="rect">
+                <a:avLst/>
+              </a:prstGeom>
+              <a:noFill/>
+            </p:spPr>
+            <p:style>
+              <a:lnRef idx="2">
+                <a:schemeClr val="accent1">
+                  <a:shade val="15000"/>
+                </a:schemeClr>
+              </a:lnRef>
+              <a:fillRef idx="1">
+                <a:schemeClr val="accent1"/>
+              </a:fillRef>
+              <a:effectRef idx="0">
+                <a:schemeClr val="accent1"/>
+              </a:effectRef>
+              <a:fontRef idx="minor">
+                <a:schemeClr val="lt1"/>
+              </a:fontRef>
+            </p:style>
+            <p:txBody>
+              <a:bodyPr rtlCol="0" anchor="ctr"/>
+              <a:lstStyle/>
+              <a:p>
+                <a:pPr algn="ctr"/>
+                <a:endParaRPr lang="en-PH"/>
+              </a:p>
+            </p:txBody>
+          </p:sp>
+          <p:sp>
+            <p:nvSpPr>
+              <p:cNvPr id="87" name="Rectangle 86">
+                <a:extLst>
+                  <a:ext uri="{FF2B5EF4-FFF2-40B4-BE49-F238E27FC236}">
+                    <a16:creationId xmlns:a16="http://schemas.microsoft.com/office/drawing/2014/main" id="{0FB3E90E-27AB-CB5C-BAC1-4D80F4B6CE51}"/>
+                  </a:ext>
+                </a:extLst>
+              </p:cNvPr>
+              <p:cNvSpPr/>
+              <p:nvPr/>
+            </p:nvSpPr>
+            <p:spPr>
+              <a:xfrm>
+                <a:off x="3657600" y="1813774"/>
+                <a:ext cx="360000" cy="144000"/>
+              </a:xfrm>
+              <a:prstGeom prst="rect">
+                <a:avLst/>
+              </a:prstGeom>
+              <a:noFill/>
+            </p:spPr>
+            <p:style>
+              <a:lnRef idx="2">
+                <a:schemeClr val="accent1">
+                  <a:shade val="15000"/>
+                </a:schemeClr>
+              </a:lnRef>
+              <a:fillRef idx="1">
+                <a:schemeClr val="accent1"/>
+              </a:fillRef>
+              <a:effectRef idx="0">
+                <a:schemeClr val="accent1"/>
+              </a:effectRef>
+              <a:fontRef idx="minor">
+                <a:schemeClr val="lt1"/>
+              </a:fontRef>
+            </p:style>
+            <p:txBody>
+              <a:bodyPr rtlCol="0" anchor="ctr"/>
+              <a:lstStyle/>
+              <a:p>
+                <a:pPr algn="ctr"/>
+                <a:endParaRPr lang="en-PH"/>
+              </a:p>
+            </p:txBody>
+          </p:sp>
+          <p:sp>
+            <p:nvSpPr>
+              <p:cNvPr id="88" name="Rectangle 87">
+                <a:extLst>
+                  <a:ext uri="{FF2B5EF4-FFF2-40B4-BE49-F238E27FC236}">
+                    <a16:creationId xmlns:a16="http://schemas.microsoft.com/office/drawing/2014/main" id="{8015A514-F54C-64B8-9761-BF95E3D35735}"/>
+                  </a:ext>
+                </a:extLst>
+              </p:cNvPr>
+              <p:cNvSpPr/>
+              <p:nvPr/>
+            </p:nvSpPr>
+            <p:spPr>
+              <a:xfrm>
+                <a:off x="4017600" y="1813774"/>
+                <a:ext cx="360000" cy="144000"/>
+              </a:xfrm>
+              <a:prstGeom prst="rect">
+                <a:avLst/>
+              </a:prstGeom>
+              <a:noFill/>
+            </p:spPr>
+            <p:style>
+              <a:lnRef idx="2">
+                <a:schemeClr val="accent1">
+                  <a:shade val="15000"/>
+                </a:schemeClr>
+              </a:lnRef>
+              <a:fillRef idx="1">
+                <a:schemeClr val="accent1"/>
+              </a:fillRef>
+              <a:effectRef idx="0">
+                <a:schemeClr val="accent1"/>
+              </a:effectRef>
+              <a:fontRef idx="minor">
+                <a:schemeClr val="lt1"/>
+              </a:fontRef>
+            </p:style>
+            <p:txBody>
+              <a:bodyPr rtlCol="0" anchor="ctr"/>
+              <a:lstStyle/>
+              <a:p>
+                <a:pPr algn="ctr"/>
+                <a:endParaRPr lang="en-PH"/>
+              </a:p>
+            </p:txBody>
+          </p:sp>
+          <p:sp>
+            <p:nvSpPr>
+              <p:cNvPr id="89" name="Rectangle 88">
+                <a:extLst>
+                  <a:ext uri="{FF2B5EF4-FFF2-40B4-BE49-F238E27FC236}">
+                    <a16:creationId xmlns:a16="http://schemas.microsoft.com/office/drawing/2014/main" id="{8816CB63-2A0C-3E33-DAA5-91044FE000F9}"/>
+                  </a:ext>
+                </a:extLst>
+              </p:cNvPr>
+              <p:cNvSpPr/>
+              <p:nvPr/>
+            </p:nvSpPr>
+            <p:spPr>
+              <a:xfrm>
+                <a:off x="4377600" y="1813774"/>
+                <a:ext cx="360000" cy="144000"/>
+              </a:xfrm>
+              <a:prstGeom prst="rect">
+                <a:avLst/>
+              </a:prstGeom>
+              <a:noFill/>
+            </p:spPr>
+            <p:style>
+              <a:lnRef idx="2">
+                <a:schemeClr val="accent1">
+                  <a:shade val="15000"/>
+                </a:schemeClr>
+              </a:lnRef>
+              <a:fillRef idx="1">
+                <a:schemeClr val="accent1"/>
+              </a:fillRef>
+              <a:effectRef idx="0">
+                <a:schemeClr val="accent1"/>
+              </a:effectRef>
+              <a:fontRef idx="minor">
+                <a:schemeClr val="lt1"/>
+              </a:fontRef>
+            </p:style>
+            <p:txBody>
+              <a:bodyPr rtlCol="0" anchor="ctr"/>
+              <a:lstStyle/>
+              <a:p>
+                <a:pPr algn="ctr"/>
+                <a:endParaRPr lang="en-PH"/>
+              </a:p>
+            </p:txBody>
+          </p:sp>
+          <p:sp>
+            <p:nvSpPr>
+              <p:cNvPr id="90" name="Rectangle 89">
+                <a:extLst>
+                  <a:ext uri="{FF2B5EF4-FFF2-40B4-BE49-F238E27FC236}">
+                    <a16:creationId xmlns:a16="http://schemas.microsoft.com/office/drawing/2014/main" id="{6C6ACB8C-157E-E480-D2C4-A3E1E350C214}"/>
+                  </a:ext>
+                </a:extLst>
+              </p:cNvPr>
+              <p:cNvSpPr/>
+              <p:nvPr/>
+            </p:nvSpPr>
+            <p:spPr>
+              <a:xfrm>
+                <a:off x="3657600" y="1957774"/>
+                <a:ext cx="360000" cy="144000"/>
+              </a:xfrm>
+              <a:prstGeom prst="rect">
+                <a:avLst/>
+              </a:prstGeom>
+              <a:noFill/>
+            </p:spPr>
+            <p:style>
+              <a:lnRef idx="2">
+                <a:schemeClr val="accent1">
+                  <a:shade val="15000"/>
+                </a:schemeClr>
+              </a:lnRef>
+              <a:fillRef idx="1">
+                <a:schemeClr val="accent1"/>
+              </a:fillRef>
+              <a:effectRef idx="0">
+                <a:schemeClr val="accent1"/>
+              </a:effectRef>
+              <a:fontRef idx="minor">
+                <a:schemeClr val="lt1"/>
+              </a:fontRef>
+            </p:style>
+            <p:txBody>
+              <a:bodyPr rtlCol="0" anchor="ctr"/>
+              <a:lstStyle/>
+              <a:p>
+                <a:pPr algn="ctr"/>
+                <a:endParaRPr lang="en-PH"/>
+              </a:p>
+            </p:txBody>
+          </p:sp>
+          <p:sp>
+            <p:nvSpPr>
+              <p:cNvPr id="91" name="Rectangle 90">
+                <a:extLst>
+                  <a:ext uri="{FF2B5EF4-FFF2-40B4-BE49-F238E27FC236}">
+                    <a16:creationId xmlns:a16="http://schemas.microsoft.com/office/drawing/2014/main" id="{1E7B450E-D067-6517-A892-FBB4F2352B62}"/>
+                  </a:ext>
+                </a:extLst>
+              </p:cNvPr>
+              <p:cNvSpPr/>
+              <p:nvPr/>
+            </p:nvSpPr>
+            <p:spPr>
+              <a:xfrm>
+                <a:off x="4017600" y="1957774"/>
+                <a:ext cx="360000" cy="144000"/>
+              </a:xfrm>
+              <a:prstGeom prst="rect">
+                <a:avLst/>
+              </a:prstGeom>
+              <a:noFill/>
+            </p:spPr>
+            <p:style>
+              <a:lnRef idx="2">
+                <a:schemeClr val="accent1">
+                  <a:shade val="15000"/>
+                </a:schemeClr>
+              </a:lnRef>
+              <a:fillRef idx="1">
+                <a:schemeClr val="accent1"/>
+              </a:fillRef>
+              <a:effectRef idx="0">
+                <a:schemeClr val="accent1"/>
+              </a:effectRef>
+              <a:fontRef idx="minor">
+                <a:schemeClr val="lt1"/>
+              </a:fontRef>
+            </p:style>
+            <p:txBody>
+              <a:bodyPr rtlCol="0" anchor="ctr"/>
+              <a:lstStyle/>
+              <a:p>
+                <a:pPr algn="ctr"/>
+                <a:endParaRPr lang="en-PH"/>
+              </a:p>
+            </p:txBody>
+          </p:sp>
+          <p:sp>
+            <p:nvSpPr>
+              <p:cNvPr id="92" name="Rectangle 91">
+                <a:extLst>
+                  <a:ext uri="{FF2B5EF4-FFF2-40B4-BE49-F238E27FC236}">
+                    <a16:creationId xmlns:a16="http://schemas.microsoft.com/office/drawing/2014/main" id="{09E54DE8-63B8-9744-FFFE-9D497EEEA6A1}"/>
+                  </a:ext>
+                </a:extLst>
+              </p:cNvPr>
+              <p:cNvSpPr/>
+              <p:nvPr/>
+            </p:nvSpPr>
+            <p:spPr>
+              <a:xfrm>
+                <a:off x="4377600" y="1957774"/>
+                <a:ext cx="360000" cy="144000"/>
+              </a:xfrm>
+              <a:prstGeom prst="rect">
+                <a:avLst/>
+              </a:prstGeom>
+              <a:noFill/>
+            </p:spPr>
+            <p:style>
+              <a:lnRef idx="2">
+                <a:schemeClr val="accent1">
+                  <a:shade val="15000"/>
+                </a:schemeClr>
+              </a:lnRef>
+              <a:fillRef idx="1">
+                <a:schemeClr val="accent1"/>
+              </a:fillRef>
+              <a:effectRef idx="0">
+                <a:schemeClr val="accent1"/>
+              </a:effectRef>
+              <a:fontRef idx="minor">
+                <a:schemeClr val="lt1"/>
+              </a:fontRef>
+            </p:style>
+            <p:txBody>
+              <a:bodyPr rtlCol="0" anchor="ctr"/>
+              <a:lstStyle/>
+              <a:p>
+                <a:pPr algn="ctr"/>
+                <a:endParaRPr lang="en-PH"/>
+              </a:p>
+            </p:txBody>
+          </p:sp>
+          <p:sp>
+            <p:nvSpPr>
+              <p:cNvPr id="93" name="Rectangle 92">
+                <a:extLst>
+                  <a:ext uri="{FF2B5EF4-FFF2-40B4-BE49-F238E27FC236}">
+                    <a16:creationId xmlns:a16="http://schemas.microsoft.com/office/drawing/2014/main" id="{A08D34DE-38E7-BC7C-FB3B-C2F40BF40E82}"/>
+                  </a:ext>
+                </a:extLst>
+              </p:cNvPr>
+              <p:cNvSpPr/>
+              <p:nvPr/>
+            </p:nvSpPr>
+            <p:spPr>
+              <a:xfrm>
+                <a:off x="3657600" y="1525774"/>
+                <a:ext cx="1080000" cy="144000"/>
+              </a:xfrm>
+              <a:prstGeom prst="rect">
+                <a:avLst/>
+              </a:prstGeom>
+              <a:solidFill>
+                <a:schemeClr val="accent1"/>
+              </a:solidFill>
+            </p:spPr>
+            <p:style>
+              <a:lnRef idx="2">
+                <a:schemeClr val="accent1">
+                  <a:shade val="15000"/>
+                </a:schemeClr>
+              </a:lnRef>
+              <a:fillRef idx="1">
+                <a:schemeClr val="accent1"/>
+              </a:fillRef>
+              <a:effectRef idx="0">
+                <a:schemeClr val="accent1"/>
+              </a:effectRef>
+              <a:fontRef idx="minor">
+                <a:schemeClr val="lt1"/>
+              </a:fontRef>
+            </p:style>
+            <p:txBody>
+              <a:bodyPr rtlCol="0" anchor="ctr"/>
+              <a:lstStyle/>
+              <a:p>
+                <a:pPr algn="ctr"/>
+                <a:endParaRPr lang="en-PH"/>
+              </a:p>
+            </p:txBody>
+          </p:sp>
+        </p:grpSp>
+        <p:sp>
+          <p:nvSpPr>
+            <p:cNvPr id="83" name="TextBox 82">
+              <a:extLst>
+                <a:ext uri="{FF2B5EF4-FFF2-40B4-BE49-F238E27FC236}">
+                  <a16:creationId xmlns:a16="http://schemas.microsoft.com/office/drawing/2014/main" id="{E6A950C7-16C2-115E-8166-F471DAE93E48}"/>
+                </a:ext>
+              </a:extLst>
+            </p:cNvPr>
+            <p:cNvSpPr txBox="1"/>
+            <p:nvPr/>
+          </p:nvSpPr>
+          <p:spPr>
+            <a:xfrm>
+              <a:off x="3180288" y="2101774"/>
+              <a:ext cx="1789507" cy="307777"/>
+            </a:xfrm>
+            <a:prstGeom prst="rect">
+              <a:avLst/>
+            </a:prstGeom>
+            <a:noFill/>
+          </p:spPr>
+          <p:txBody>
+            <a:bodyPr wrap="square" rtlCol="0">
+              <a:spAutoFit/>
+            </a:bodyPr>
+            <a:lstStyle/>
+            <a:p>
+              <a:pPr algn="ctr"/>
+              <a:r>
+                <a:rPr lang="en-PH" sz="1400" dirty="0"/>
+                <a:t>Historical Emails</a:t>
+              </a:r>
+            </a:p>
+          </p:txBody>
+        </p:sp>
+      </p:grpSp>
+    </p:spTree>
+    <p:extLst>
+      <p:ext uri="{BB962C8B-B14F-4D97-AF65-F5344CB8AC3E}">
+        <p14:creationId xmlns:p14="http://schemas.microsoft.com/office/powerpoint/2010/main" val="127354267"/>
+      </p:ext>
+    </p:extLst>
+  </p:cSld>
+  <p:clrMapOvr>
+    <a:masterClrMapping/>
+  </p:clrMapOvr>
+</p:sld>
+</file>
+
 <file path=ppt/theme/theme1.xml><?xml version="1.0" encoding="utf-8"?>
 <a:theme xmlns:a="http://schemas.openxmlformats.org/drawingml/2006/main" name="Office Theme">
   <a:themeElements>
